--- a/assets/pptx-tpl/ux-research-2.pptx
+++ b/assets/pptx-tpl/ux-research-2.pptx
@@ -9,13 +9,14 @@
     <p:notesMasterId r:id="rId7"/>
   </p:notesMasterIdLst>
   <p:sldIdLst>
-    <p:sldId id="256" r:id="rId8"/>
+    <p:sldId id="268" r:id="rId32"/>
     <p:sldId id="262" r:id="rId14"/>
     <p:sldId id="263" r:id="rId15"/>
     <p:sldId id="264" r:id="rId16"/>
     <p:sldId id="265" r:id="rId17"/>
     <p:sldId id="266" r:id="rId18"/>
     <p:sldId id="267" r:id="rId19"/>
+    <p:sldId id="269" r:id="rId33"/>
   </p:sldIdLst>
   <p:sldSz cy="5143500" cx="9144000"/>
   <p:notesSz cx="6858000" cy="9144000"/>
@@ -9018,1159 +9019,6 @@
 </p:sldMaster>
 </file>
 
-<file path=ppt/slides/slide1.xml><?xml version="1.0" encoding="utf-8"?>
-<p:sld xmlns:a="http://schemas.openxmlformats.org/drawingml/2006/main" xmlns:r="http://schemas.openxmlformats.org/officeDocument/2006/relationships" xmlns:mc="http://schemas.openxmlformats.org/markup-compatibility/2006" xmlns:mv="urn:schemas-microsoft-com:mac:vml" xmlns:p="http://schemas.openxmlformats.org/presentationml/2006/main" xmlns:c="http://schemas.openxmlformats.org/drawingml/2006/chart" xmlns:dgm="http://schemas.openxmlformats.org/drawingml/2006/diagram" xmlns:o="urn:schemas-microsoft-com:office:office" xmlns:v="urn:schemas-microsoft-com:vml" xmlns:pvml="urn:schemas-microsoft-com:office:powerpoint" xmlns:com="http://schemas.openxmlformats.org/drawingml/2006/compatibility" xmlns:p14="http://schemas.microsoft.com/office/powerpoint/2010/main" xmlns:p15="http://schemas.microsoft.com/office/powerpoint/2012/main" xmlns:ahyp="http://schemas.microsoft.com/office/drawing/2018/hyperlinkcolor">
-  <p:cSld>
-    <p:spTree>
-      <p:nvGrpSpPr>
-        <p:cNvPr id="71" name="Shape 71"/>
-        <p:cNvGrpSpPr/>
-        <p:nvPr/>
-      </p:nvGrpSpPr>
-      <p:grpSpPr>
-        <a:xfrm>
-          <a:off x="0" y="0"/>
-          <a:ext cx="0" cy="0"/>
-          <a:chOff x="0" y="0"/>
-          <a:chExt cx="0" cy="0"/>
-        </a:xfrm>
-      </p:grpSpPr>
-      <p:sp>
-        <p:nvSpPr>
-          <p:cNvPr id="72" name="Google Shape;72;p17"/>
-          <p:cNvSpPr/>
-          <p:nvPr/>
-        </p:nvSpPr>
-        <p:spPr>
-          <a:xfrm>
-            <a:off x="0" y="-3"/>
-            <a:ext cx="9144000" cy="5143497"/>
-          </a:xfrm>
-          <a:prstGeom prst="rect">
-            <a:avLst/>
-          </a:prstGeom>
-          <a:gradFill>
-            <a:gsLst>
-              <a:gs pos="0">
-                <a:srgbClr val="5BB180"/>
-              </a:gs>
-              <a:gs pos="29000">
-                <a:srgbClr val="05121A"/>
-              </a:gs>
-              <a:gs pos="100000">
-                <a:srgbClr val="05121A"/>
-              </a:gs>
-            </a:gsLst>
-            <a:path path="circle">
-              <a:fillToRect b="0%" l="100%" r="0%" t="100%"/>
-            </a:path>
-            <a:tileRect b="-100%" l="0%" r="-100%" t="0%"/>
-          </a:gradFill>
-          <a:ln>
-            <a:noFill/>
-          </a:ln>
-        </p:spPr>
-        <p:txBody>
-          <a:bodyPr anchorCtr="0" anchor="ctr" bIns="34275" lIns="68575" spcFirstLastPara="1" rIns="68575" wrap="square" tIns="34275">
-            <a:noAutofit/>
-          </a:bodyPr>
-          <a:lstStyle/>
-          <a:p>
-            <a:pPr indent="0" lvl="0" marL="0" marR="0" rtl="0" algn="ctr">
-              <a:lnSpc>
-                <a:spcPct val="100000"/>
-              </a:lnSpc>
-              <a:spcBef>
-                <a:spcPts val="0"/>
-              </a:spcBef>
-              <a:spcAft>
-                <a:spcPts val="0"/>
-              </a:spcAft>
-              <a:buClr>
-                <a:srgbClr val="000000"/>
-              </a:buClr>
-              <a:buSzPts val="1400"/>
-              <a:buFont typeface="Arial"/>
-              <a:buNone/>
-            </a:pPr>
-            <a:r>
-              <a:t/>
-            </a:r>
-            <a:endParaRPr b="0" i="0" sz="1400" u="none" cap="none" strike="noStrike">
-              <a:solidFill>
-                <a:schemeClr val="lt1"/>
-              </a:solidFill>
-              <a:latin typeface="Manrope"/>
-              <a:ea typeface="Manrope"/>
-              <a:cs typeface="Manrope"/>
-              <a:sym typeface="Manrope"/>
-            </a:endParaRPr>
-          </a:p>
-        </p:txBody>
-      </p:sp>
-      <p:sp>
-        <p:nvSpPr>
-          <p:cNvPr id="73" name="Google Shape;73;p17"/>
-          <p:cNvSpPr/>
-          <p:nvPr/>
-        </p:nvSpPr>
-        <p:spPr>
-          <a:xfrm flipH="1">
-            <a:off x="-6" y="3038478"/>
-            <a:ext cx="3876676" cy="2105022"/>
-          </a:xfrm>
-          <a:prstGeom prst="rect">
-            <a:avLst/>
-          </a:prstGeom>
-          <a:gradFill>
-            <a:gsLst>
-              <a:gs pos="0">
-                <a:srgbClr val="5BB180"/>
-              </a:gs>
-              <a:gs pos="26000">
-                <a:srgbClr val="05121A"/>
-              </a:gs>
-              <a:gs pos="100000">
-                <a:srgbClr val="05121A"/>
-              </a:gs>
-            </a:gsLst>
-            <a:path path="circle">
-              <a:fillToRect b="0%" l="100%" r="0%" t="100%"/>
-            </a:path>
-            <a:tileRect b="-100%" l="0%" r="-100%" t="0%"/>
-          </a:gradFill>
-          <a:ln>
-            <a:noFill/>
-          </a:ln>
-        </p:spPr>
-        <p:txBody>
-          <a:bodyPr anchorCtr="0" anchor="ctr" bIns="34275" lIns="68575" spcFirstLastPara="1" rIns="68575" wrap="square" tIns="34275">
-            <a:noAutofit/>
-          </a:bodyPr>
-          <a:lstStyle/>
-          <a:p>
-            <a:pPr indent="0" lvl="0" marL="0" marR="0" rtl="0" algn="ctr">
-              <a:lnSpc>
-                <a:spcPct val="100000"/>
-              </a:lnSpc>
-              <a:spcBef>
-                <a:spcPts val="0"/>
-              </a:spcBef>
-              <a:spcAft>
-                <a:spcPts val="0"/>
-              </a:spcAft>
-              <a:buClr>
-                <a:srgbClr val="000000"/>
-              </a:buClr>
-              <a:buSzPts val="1400"/>
-              <a:buFont typeface="Arial"/>
-              <a:buNone/>
-            </a:pPr>
-            <a:r>
-              <a:t/>
-            </a:r>
-            <a:endParaRPr b="0" i="0" sz="1400" u="none" cap="none" strike="noStrike">
-              <a:solidFill>
-                <a:schemeClr val="lt1"/>
-              </a:solidFill>
-              <a:latin typeface="Manrope"/>
-              <a:ea typeface="Manrope"/>
-              <a:cs typeface="Manrope"/>
-              <a:sym typeface="Manrope"/>
-            </a:endParaRPr>
-          </a:p>
-        </p:txBody>
-      </p:sp>
-      <p:sp>
-        <p:nvSpPr>
-          <p:cNvPr id="74" name="Google Shape;74;p17"/>
-          <p:cNvSpPr/>
-          <p:nvPr/>
-        </p:nvSpPr>
-        <p:spPr>
-          <a:xfrm flipH="1" rot="-5400000">
-            <a:off x="6883242" y="-392802"/>
-            <a:ext cx="1881188" cy="2640332"/>
-          </a:xfrm>
-          <a:prstGeom prst="flowChartManualInput">
-            <a:avLst/>
-          </a:prstGeom>
-          <a:gradFill>
-            <a:gsLst>
-              <a:gs pos="0">
-                <a:schemeClr val="accent3"/>
-              </a:gs>
-              <a:gs pos="38000">
-                <a:srgbClr val="5BB180"/>
-              </a:gs>
-              <a:gs pos="67000">
-                <a:srgbClr val="31644F"/>
-              </a:gs>
-              <a:gs pos="100000">
-                <a:srgbClr val="05121A"/>
-              </a:gs>
-            </a:gsLst>
-            <a:path path="circle">
-              <a:fillToRect b="100%" l="100%" r="0%" t="0%"/>
-            </a:path>
-            <a:tileRect b="0%" l="0%" r="-100%" t="-100%"/>
-          </a:gradFill>
-          <a:ln>
-            <a:noFill/>
-          </a:ln>
-        </p:spPr>
-        <p:txBody>
-          <a:bodyPr anchorCtr="0" anchor="ctr" bIns="34275" lIns="68575" spcFirstLastPara="1" rIns="68575" wrap="square" tIns="34275">
-            <a:noAutofit/>
-          </a:bodyPr>
-          <a:lstStyle/>
-          <a:p>
-            <a:pPr indent="0" lvl="0" marL="0" marR="0" rtl="0" algn="ctr">
-              <a:lnSpc>
-                <a:spcPct val="100000"/>
-              </a:lnSpc>
-              <a:spcBef>
-                <a:spcPts val="0"/>
-              </a:spcBef>
-              <a:spcAft>
-                <a:spcPts val="0"/>
-              </a:spcAft>
-              <a:buClr>
-                <a:srgbClr val="000000"/>
-              </a:buClr>
-              <a:buSzPts val="1400"/>
-              <a:buFont typeface="Arial"/>
-              <a:buNone/>
-            </a:pPr>
-            <a:r>
-              <a:t/>
-            </a:r>
-            <a:endParaRPr b="0" i="0" sz="1400" u="none" cap="none" strike="noStrike">
-              <a:solidFill>
-                <a:schemeClr val="lt1"/>
-              </a:solidFill>
-              <a:latin typeface="Manrope"/>
-              <a:ea typeface="Manrope"/>
-              <a:cs typeface="Manrope"/>
-              <a:sym typeface="Manrope"/>
-            </a:endParaRPr>
-          </a:p>
-        </p:txBody>
-      </p:sp>
-      <p:sp>
-        <p:nvSpPr>
-          <p:cNvPr id="75" name="Google Shape;75;p17"/>
-          <p:cNvSpPr/>
-          <p:nvPr/>
-        </p:nvSpPr>
-        <p:spPr>
-          <a:xfrm>
-            <a:off x="-3" y="0"/>
-            <a:ext cx="7184574" cy="5143497"/>
-          </a:xfrm>
-          <a:custGeom>
-            <a:rect b="b" l="l" r="r" t="t"/>
-            <a:pathLst>
-              <a:path extrusionOk="0" h="6857996" w="9579432">
-                <a:moveTo>
-                  <a:pt x="0" y="0"/>
-                </a:moveTo>
-                <a:lnTo>
-                  <a:pt x="9579432" y="0"/>
-                </a:lnTo>
-                <a:lnTo>
-                  <a:pt x="9579431" y="4"/>
-                </a:lnTo>
-                <a:lnTo>
-                  <a:pt x="3913990" y="4"/>
-                </a:lnTo>
-                <a:lnTo>
-                  <a:pt x="4570139" y="1768319"/>
-                </a:lnTo>
-                <a:cubicBezTo>
-                  <a:pt x="4570139" y="1768319"/>
-                  <a:pt x="4938048" y="2505077"/>
-                  <a:pt x="5705107" y="2505077"/>
-                </a:cubicBezTo>
-                <a:lnTo>
-                  <a:pt x="8676383" y="2505077"/>
-                </a:lnTo>
-                <a:lnTo>
-                  <a:pt x="7107210" y="6857996"/>
-                </a:lnTo>
-                <a:lnTo>
-                  <a:pt x="1136912" y="6857996"/>
-                </a:lnTo>
-                <a:lnTo>
-                  <a:pt x="0" y="3704178"/>
-                </a:lnTo>
-                <a:lnTo>
-                  <a:pt x="0" y="0"/>
-                </a:lnTo>
-                <a:close/>
-              </a:path>
-            </a:pathLst>
-          </a:custGeom>
-          <a:gradFill>
-            <a:gsLst>
-              <a:gs pos="0">
-                <a:schemeClr val="accent3"/>
-              </a:gs>
-              <a:gs pos="44000">
-                <a:srgbClr val="5BB180"/>
-              </a:gs>
-              <a:gs pos="67000">
-                <a:srgbClr val="31644F"/>
-              </a:gs>
-              <a:gs pos="100000">
-                <a:srgbClr val="05121A"/>
-              </a:gs>
-            </a:gsLst>
-            <a:path path="circle">
-              <a:fillToRect b="100%" l="100%" r="0%" t="0%"/>
-            </a:path>
-            <a:tileRect b="0%" l="0%" r="-100%" t="-100%"/>
-          </a:gradFill>
-          <a:ln>
-            <a:noFill/>
-          </a:ln>
-        </p:spPr>
-        <p:txBody>
-          <a:bodyPr anchorCtr="0" anchor="ctr" bIns="34275" lIns="68575" spcFirstLastPara="1" rIns="68575" wrap="square" tIns="34275">
-            <a:noAutofit/>
-          </a:bodyPr>
-          <a:lstStyle/>
-          <a:p>
-            <a:pPr indent="0" lvl="0" marL="0" marR="0" rtl="0" algn="ctr">
-              <a:lnSpc>
-                <a:spcPct val="100000"/>
-              </a:lnSpc>
-              <a:spcBef>
-                <a:spcPts val="0"/>
-              </a:spcBef>
-              <a:spcAft>
-                <a:spcPts val="0"/>
-              </a:spcAft>
-              <a:buClr>
-                <a:srgbClr val="000000"/>
-              </a:buClr>
-              <a:buSzPts val="1400"/>
-              <a:buFont typeface="Arial"/>
-              <a:buNone/>
-            </a:pPr>
-            <a:r>
-              <a:t/>
-            </a:r>
-            <a:endParaRPr b="0" i="0" sz="1400" u="none" cap="none" strike="noStrike">
-              <a:solidFill>
-                <a:schemeClr val="lt1"/>
-              </a:solidFill>
-              <a:latin typeface="Manrope"/>
-              <a:ea typeface="Manrope"/>
-              <a:cs typeface="Manrope"/>
-              <a:sym typeface="Manrope"/>
-            </a:endParaRPr>
-          </a:p>
-        </p:txBody>
-      </p:sp>
-      <p:sp>
-        <p:nvSpPr>
-          <p:cNvPr id="76" name="Google Shape;76;p17"/>
-          <p:cNvSpPr/>
-          <p:nvPr/>
-        </p:nvSpPr>
-        <p:spPr>
-          <a:xfrm>
-            <a:off x="21428" y="0"/>
-            <a:ext cx="7184574" cy="5143497"/>
-          </a:xfrm>
-          <a:custGeom>
-            <a:rect b="b" l="l" r="r" t="t"/>
-            <a:pathLst>
-              <a:path extrusionOk="0" h="6857996" w="9579432">
-                <a:moveTo>
-                  <a:pt x="0" y="0"/>
-                </a:moveTo>
-                <a:lnTo>
-                  <a:pt x="9579432" y="0"/>
-                </a:lnTo>
-                <a:lnTo>
-                  <a:pt x="9579431" y="4"/>
-                </a:lnTo>
-                <a:lnTo>
-                  <a:pt x="3913990" y="4"/>
-                </a:lnTo>
-                <a:lnTo>
-                  <a:pt x="4570139" y="1768319"/>
-                </a:lnTo>
-                <a:cubicBezTo>
-                  <a:pt x="4570139" y="1768319"/>
-                  <a:pt x="4938048" y="2505077"/>
-                  <a:pt x="5705107" y="2505077"/>
-                </a:cubicBezTo>
-                <a:lnTo>
-                  <a:pt x="8676383" y="2505077"/>
-                </a:lnTo>
-                <a:lnTo>
-                  <a:pt x="7107210" y="6857996"/>
-                </a:lnTo>
-                <a:lnTo>
-                  <a:pt x="1136912" y="6857996"/>
-                </a:lnTo>
-                <a:lnTo>
-                  <a:pt x="0" y="3704178"/>
-                </a:lnTo>
-                <a:lnTo>
-                  <a:pt x="0" y="0"/>
-                </a:lnTo>
-                <a:close/>
-              </a:path>
-            </a:pathLst>
-          </a:custGeom>
-          <a:gradFill>
-            <a:gsLst>
-              <a:gs pos="0">
-                <a:srgbClr val="05121A"/>
-              </a:gs>
-              <a:gs pos="43000">
-                <a:srgbClr val="31644F"/>
-              </a:gs>
-              <a:gs pos="67000">
-                <a:srgbClr val="31644F"/>
-              </a:gs>
-              <a:gs pos="100000">
-                <a:srgbClr val="05121A">
-                  <a:alpha val="0"/>
-                </a:srgbClr>
-              </a:gs>
-            </a:gsLst>
-            <a:path path="circle">
-              <a:fillToRect b="100%" l="0%" r="100%" t="0%"/>
-            </a:path>
-            <a:tileRect b="0%" l="-100%" r="0%" t="-100%"/>
-          </a:gradFill>
-          <a:ln>
-            <a:noFill/>
-          </a:ln>
-        </p:spPr>
-        <p:txBody>
-          <a:bodyPr anchorCtr="0" anchor="ctr" bIns="34275" lIns="68575" spcFirstLastPara="1" rIns="68575" wrap="square" tIns="34275">
-            <a:noAutofit/>
-          </a:bodyPr>
-          <a:lstStyle/>
-          <a:p>
-            <a:pPr indent="0" lvl="0" marL="0" marR="0" rtl="0" algn="ctr">
-              <a:lnSpc>
-                <a:spcPct val="100000"/>
-              </a:lnSpc>
-              <a:spcBef>
-                <a:spcPts val="0"/>
-              </a:spcBef>
-              <a:spcAft>
-                <a:spcPts val="0"/>
-              </a:spcAft>
-              <a:buClr>
-                <a:srgbClr val="000000"/>
-              </a:buClr>
-              <a:buSzPts val="1400"/>
-              <a:buFont typeface="Arial"/>
-              <a:buNone/>
-            </a:pPr>
-            <a:r>
-              <a:t/>
-            </a:r>
-            <a:endParaRPr b="0" i="0" sz="1400" u="none" cap="none" strike="noStrike">
-              <a:solidFill>
-                <a:schemeClr val="lt1"/>
-              </a:solidFill>
-              <a:latin typeface="Manrope"/>
-              <a:ea typeface="Manrope"/>
-              <a:cs typeface="Manrope"/>
-              <a:sym typeface="Manrope"/>
-            </a:endParaRPr>
-          </a:p>
-        </p:txBody>
-      </p:sp>
-      <p:grpSp>
-        <p:nvGrpSpPr>
-          <p:cNvPr id="77" name="Google Shape;77;p17"/>
-          <p:cNvGrpSpPr/>
-          <p:nvPr/>
-        </p:nvGrpSpPr>
-        <p:grpSpPr>
-          <a:xfrm>
-            <a:off x="4712199" y="-147"/>
-            <a:ext cx="3944541" cy="3257841"/>
-            <a:chOff x="4712199" y="-350860"/>
-            <a:chExt cx="3944541" cy="3257841"/>
-          </a:xfrm>
-        </p:grpSpPr>
-        <p:cxnSp>
-          <p:nvCxnSpPr>
-            <p:cNvPr id="78" name="Google Shape;78;p17"/>
-            <p:cNvCxnSpPr>
-              <a:endCxn id="79" idx="2"/>
-            </p:cNvCxnSpPr>
-            <p:nvPr/>
-          </p:nvCxnSpPr>
-          <p:spPr>
-            <a:xfrm>
-              <a:off x="4712199" y="2906980"/>
-              <a:ext cx="3733800" cy="0"/>
-            </a:xfrm>
-            <a:prstGeom prst="straightConnector1">
-              <a:avLst/>
-            </a:prstGeom>
-            <a:noFill/>
-            <a:ln cap="flat" cmpd="sng" w="12700">
-              <a:solidFill>
-                <a:schemeClr val="lt1">
-                  <a:alpha val="32941"/>
-                </a:schemeClr>
-              </a:solidFill>
-              <a:prstDash val="solid"/>
-              <a:miter lim="800000"/>
-              <a:headEnd len="sm" w="sm" type="none"/>
-              <a:tailEnd len="sm" w="sm" type="none"/>
-            </a:ln>
-          </p:spPr>
-        </p:cxnSp>
-        <p:cxnSp>
-          <p:nvCxnSpPr>
-            <p:cNvPr id="80" name="Google Shape;80;p17"/>
-            <p:cNvCxnSpPr>
-              <a:endCxn id="79" idx="0"/>
-            </p:cNvCxnSpPr>
-            <p:nvPr/>
-          </p:nvCxnSpPr>
-          <p:spPr>
-            <a:xfrm>
-              <a:off x="8656739" y="-350860"/>
-              <a:ext cx="0" cy="3047100"/>
-            </a:xfrm>
-            <a:prstGeom prst="straightConnector1">
-              <a:avLst/>
-            </a:prstGeom>
-            <a:noFill/>
-            <a:ln cap="flat" cmpd="sng" w="12700">
-              <a:solidFill>
-                <a:srgbClr val="EDF1FF">
-                  <a:alpha val="32941"/>
-                </a:srgbClr>
-              </a:solidFill>
-              <a:prstDash val="solid"/>
-              <a:miter lim="800000"/>
-              <a:headEnd len="sm" w="sm" type="none"/>
-              <a:tailEnd len="sm" w="sm" type="none"/>
-            </a:ln>
-          </p:spPr>
-        </p:cxnSp>
-        <p:sp>
-          <p:nvSpPr>
-            <p:cNvPr id="79" name="Google Shape;79;p17"/>
-            <p:cNvSpPr/>
-            <p:nvPr/>
-          </p:nvSpPr>
-          <p:spPr>
-            <a:xfrm rot="5400000">
-              <a:off x="8235258" y="2485499"/>
-              <a:ext cx="421481" cy="421481"/>
-            </a:xfrm>
-            <a:prstGeom prst="arc">
-              <a:avLst>
-                <a:gd fmla="val 16200000" name="adj1"/>
-                <a:gd fmla="val 0" name="adj2"/>
-              </a:avLst>
-            </a:prstGeom>
-            <a:noFill/>
-            <a:ln cap="flat" cmpd="sng" w="12700">
-              <a:solidFill>
-                <a:schemeClr val="lt1">
-                  <a:alpha val="32941"/>
-                </a:schemeClr>
-              </a:solidFill>
-              <a:prstDash val="solid"/>
-              <a:miter lim="800000"/>
-              <a:headEnd len="sm" w="sm" type="none"/>
-              <a:tailEnd len="sm" w="sm" type="none"/>
-            </a:ln>
-          </p:spPr>
-          <p:txBody>
-            <a:bodyPr anchorCtr="0" anchor="ctr" bIns="34275" lIns="68575" spcFirstLastPara="1" rIns="68575" wrap="square" tIns="34275">
-              <a:noAutofit/>
-            </a:bodyPr>
-            <a:lstStyle/>
-            <a:p>
-              <a:pPr indent="0" lvl="0" marL="0" marR="0" rtl="0" algn="ctr">
-                <a:lnSpc>
-                  <a:spcPct val="100000"/>
-                </a:lnSpc>
-                <a:spcBef>
-                  <a:spcPts val="0"/>
-                </a:spcBef>
-                <a:spcAft>
-                  <a:spcPts val="0"/>
-                </a:spcAft>
-                <a:buClr>
-                  <a:srgbClr val="000000"/>
-                </a:buClr>
-                <a:buSzPts val="1400"/>
-                <a:buFont typeface="Arial"/>
-                <a:buNone/>
-              </a:pPr>
-              <a:r>
-                <a:t/>
-              </a:r>
-              <a:endParaRPr b="0" i="0" sz="1400" u="none" cap="none" strike="noStrike">
-                <a:solidFill>
-                  <a:schemeClr val="dk1"/>
-                </a:solidFill>
-                <a:latin typeface="Manrope"/>
-                <a:ea typeface="Manrope"/>
-                <a:cs typeface="Manrope"/>
-                <a:sym typeface="Manrope"/>
-              </a:endParaRPr>
-            </a:p>
-          </p:txBody>
-        </p:sp>
-      </p:grpSp>
-      <p:pic>
-        <p:nvPicPr>
-          <p:cNvPr id="81" name="Google Shape;81;p17"/>
-          <p:cNvPicPr preferRelativeResize="0"/>
-          <p:nvPr/>
-        </p:nvPicPr>
-        <p:blipFill rotWithShape="1">
-          <a:blip r:embed="rId3">
-            <a:alphaModFix/>
-          </a:blip>
-          <a:srcRect b="11716" l="0" r="0" t="15703"/>
-          <a:stretch/>
-        </p:blipFill>
-        <p:spPr>
-          <a:xfrm rot="8036273">
-            <a:off x="2110577" y="-1604313"/>
-            <a:ext cx="4403381" cy="6394153"/>
-          </a:xfrm>
-          <a:custGeom>
-            <a:rect b="b" l="l" r="r" t="t"/>
-            <a:pathLst>
-              <a:path extrusionOk="0" h="8525537" w="5871174">
-                <a:moveTo>
-                  <a:pt x="4093990" y="8525537"/>
-                </a:moveTo>
-                <a:lnTo>
-                  <a:pt x="0" y="4276878"/>
-                </a:lnTo>
-                <a:lnTo>
-                  <a:pt x="0" y="4276873"/>
-                </a:lnTo>
-                <a:lnTo>
-                  <a:pt x="2679906" y="7058024"/>
-                </a:lnTo>
-                <a:lnTo>
-                  <a:pt x="3497969" y="5358541"/>
-                </a:lnTo>
-                <a:cubicBezTo>
-                  <a:pt x="3497969" y="5358541"/>
-                  <a:pt x="3773219" y="4582393"/>
-                  <a:pt x="3240973" y="4030039"/>
-                </a:cubicBezTo>
-                <a:lnTo>
-                  <a:pt x="1179270" y="1890446"/>
-                </a:lnTo>
-                <a:lnTo>
-                  <a:pt x="5402589" y="0"/>
-                </a:lnTo>
-                <a:lnTo>
-                  <a:pt x="5871174" y="486288"/>
-                </a:lnTo>
-                <a:lnTo>
-                  <a:pt x="5871174" y="8525537"/>
-                </a:lnTo>
-                <a:close/>
-              </a:path>
-            </a:pathLst>
-          </a:custGeom>
-          <a:noFill/>
-          <a:ln>
-            <a:noFill/>
-          </a:ln>
-        </p:spPr>
-      </p:pic>
-      <p:pic>
-        <p:nvPicPr>
-          <p:cNvPr id="82" name="Google Shape;82;p17"/>
-          <p:cNvPicPr preferRelativeResize="0"/>
-          <p:nvPr/>
-        </p:nvPicPr>
-        <p:blipFill rotWithShape="1">
-          <a:blip r:embed="rId4">
-            <a:alphaModFix/>
-          </a:blip>
-          <a:srcRect b="16617" l="4466" r="0" t="21653"/>
-          <a:stretch/>
-        </p:blipFill>
-        <p:spPr>
-          <a:xfrm rot="-2246355">
-            <a:off x="6415122" y="10877"/>
-            <a:ext cx="2148739" cy="2777749"/>
-          </a:xfrm>
-          <a:custGeom>
-            <a:rect b="b" l="l" r="r" t="t"/>
-            <a:pathLst>
-              <a:path extrusionOk="0" h="3703665" w="2864985">
-                <a:moveTo>
-                  <a:pt x="2083861" y="0"/>
-                </a:moveTo>
-                <a:lnTo>
-                  <a:pt x="2864985" y="598063"/>
-                </a:lnTo>
-                <a:lnTo>
-                  <a:pt x="2864985" y="3612553"/>
-                </a:lnTo>
-                <a:lnTo>
-                  <a:pt x="2795226" y="3703665"/>
-                </a:lnTo>
-                <a:lnTo>
-                  <a:pt x="0" y="1563517"/>
-                </a:lnTo>
-                <a:close/>
-              </a:path>
-            </a:pathLst>
-          </a:custGeom>
-          <a:noFill/>
-          <a:ln>
-            <a:noFill/>
-          </a:ln>
-        </p:spPr>
-      </p:pic>
-      <p:sp>
-        <p:nvSpPr>
-          <p:cNvPr id="83" name="Google Shape;83;p17"/>
-          <p:cNvSpPr txBox="1"/>
-          <p:nvPr/>
-        </p:nvSpPr>
-        <p:spPr>
-          <a:xfrm>
-            <a:off x="796542" y="2260111"/>
-            <a:ext cx="5231027" cy="1300326"/>
-          </a:xfrm>
-          <a:prstGeom prst="rect">
-            <a:avLst/>
-          </a:prstGeom>
-          <a:noFill/>
-          <a:ln>
-            <a:noFill/>
-          </a:ln>
-        </p:spPr>
-        <p:txBody>
-          <a:bodyPr anchorCtr="0" anchor="t" bIns="34275" lIns="0" spcFirstLastPara="1" rIns="68575" wrap="square" tIns="34275">
-            <a:spAutoFit/>
-          </a:bodyPr>
-          <a:lstStyle/>
-          <a:p>
-            <a:pPr indent="0" lvl="0" marL="0" marR="0" rtl="0" algn="l">
-              <a:lnSpc>
-                <a:spcPct val="100000"/>
-              </a:lnSpc>
-              <a:spcBef>
-                <a:spcPts val="0"/>
-              </a:spcBef>
-              <a:spcAft>
-                <a:spcPts val="0"/>
-              </a:spcAft>
-              <a:buClr>
-                <a:srgbClr val="000000"/>
-              </a:buClr>
-              <a:buSzPts val="4000"/>
-              <a:buFont typeface="Arial"/>
-              <a:buNone/>
-            </a:pPr>
-            <a:r>
-              <a:rPr b="1" i="0" lang="mn-MN" sz="4000" u="none" cap="none" strike="noStrike">
-                <a:solidFill>
-                  <a:srgbClr val="FADF4B"/>
-                </a:solidFill>
-                <a:latin typeface="Montserrat"/>
-                <a:ea typeface="Montserrat"/>
-                <a:cs typeface="Montserrat"/>
-                <a:sym typeface="Montserrat"/>
-              </a:rPr>
-              <a:t>UX </a:t>
-            </a:r>
-            <a:r>
-              <a:rPr b="1" i="0" lang="mn-MN" sz="4000" u="none" cap="none" strike="noStrike">
-                <a:solidFill>
-                  <a:schemeClr val="lt1"/>
-                </a:solidFill>
-                <a:latin typeface="Montserrat"/>
-                <a:ea typeface="Montserrat"/>
-                <a:cs typeface="Montserrat"/>
-                <a:sym typeface="Montserrat"/>
-              </a:rPr>
-              <a:t>судалгааны тайлан</a:t>
-            </a:r>
-            <a:endParaRPr/>
-          </a:p>
-        </p:txBody>
-      </p:sp>
-      <p:sp>
-        <p:nvSpPr>
-          <p:cNvPr id="84" name="Google Shape;84;p17"/>
-          <p:cNvSpPr txBox="1"/>
-          <p:nvPr/>
-        </p:nvSpPr>
-        <p:spPr>
-          <a:xfrm>
-            <a:off x="796542" y="3660518"/>
-            <a:ext cx="3168331" cy="615523"/>
-          </a:xfrm>
-          <a:prstGeom prst="rect">
-            <a:avLst/>
-          </a:prstGeom>
-          <a:noFill/>
-          <a:ln>
-            <a:noFill/>
-          </a:ln>
-        </p:spPr>
-        <p:txBody>
-          <a:bodyPr anchorCtr="0" anchor="t" bIns="34275" lIns="0" spcFirstLastPara="1" rIns="68575" wrap="square" tIns="34275">
-            <a:spAutoFit/>
-          </a:bodyPr>
-          <a:lstStyle/>
-          <a:p>
-            <a:pPr indent="0" lvl="0" marL="0" marR="0" rtl="0" algn="l">
-              <a:lnSpc>
-                <a:spcPct val="100000"/>
-              </a:lnSpc>
-              <a:spcBef>
-                <a:spcPts val="0"/>
-              </a:spcBef>
-              <a:spcAft>
-                <a:spcPts val="300"/>
-              </a:spcAft>
-              <a:buClr>
-                <a:srgbClr val="000000"/>
-              </a:buClr>
-              <a:buSzPts val="1100"/>
-              <a:buFont typeface="Arial"/>
-              <a:buNone/>
-            </a:pPr>
-            <a:r>
-              <a:rPr b="0" i="0" lang="mn-MN" sz="1100" u="none" cap="none" strike="noStrike">
-                <a:solidFill>
-                  <a:schemeClr val="lt1"/>
-                </a:solidFill>
-                <a:latin typeface="Arial"/>
-                <a:ea typeface="Arial"/>
-                <a:cs typeface="Arial"/>
-                <a:sym typeface="Arial"/>
-              </a:rPr>
-              <a:t>Үзэгчдэд хэрэгтэй мэдээллийг өгнө. Тоо баримт, жишээ ашиглавал илүү үр дүнтэй.</a:t>
-            </a:r>
-            <a:endParaRPr b="0" i="0" sz="1100" u="none" cap="none" strike="noStrike">
-              <a:solidFill>
-                <a:schemeClr val="lt1"/>
-              </a:solidFill>
-              <a:latin typeface="Arial"/>
-              <a:ea typeface="Arial"/>
-              <a:cs typeface="Arial"/>
-              <a:sym typeface="Arial"/>
-            </a:endParaRPr>
-          </a:p>
-        </p:txBody>
-      </p:sp>
-      <p:pic>
-        <p:nvPicPr>
-          <p:cNvPr descr="24slides Karir &amp; Profil 2022 | Glints" id="85" name="Google Shape;85;p17"/>
-          <p:cNvPicPr preferRelativeResize="0"/>
-          <p:nvPr/>
-        </p:nvPicPr>
-        <p:blipFill rotWithShape="1">
-          <a:blip r:embed="rIdGc1">
-            <a:alphaModFix/>
-          </a:blip>
-          <a:stretch/>
-        </p:blipFill>
-        <p:spPr>
-          <a:xfrm>
-            <a:off x="7860050" y="4454445"/>
-            <a:ext cx="1033125" cy="333725"/>
-          </a:xfrm>
-          <a:prstGeom prst="rect">
-            <a:avLst/>
-          </a:prstGeom>
-          <a:noFill/>
-          <a:ln>
-            <a:noFill/>
-          </a:ln>
-        </p:spPr>
-      </p:pic>
-      <p:grpSp>
-        <p:nvGrpSpPr>
-          <p:cNvPr id="86" name="Google Shape;86;p17"/>
-          <p:cNvGrpSpPr/>
-          <p:nvPr/>
-        </p:nvGrpSpPr>
-        <p:grpSpPr>
-          <a:xfrm rot="2700000">
-            <a:off x="4223323" y="3104676"/>
-            <a:ext cx="308529" cy="307776"/>
-            <a:chOff x="10439928" y="2985331"/>
-            <a:chExt cx="641137" cy="639573"/>
-          </a:xfrm>
-        </p:grpSpPr>
-        <p:sp>
-          <p:nvSpPr>
-            <p:cNvPr id="87" name="Google Shape;87;p17"/>
-            <p:cNvSpPr/>
-            <p:nvPr/>
-          </p:nvSpPr>
-          <p:spPr>
-            <a:xfrm>
-              <a:off x="10439928" y="2985331"/>
-              <a:ext cx="637800" cy="637800"/>
-            </a:xfrm>
-            <a:prstGeom prst="ellipse">
-              <a:avLst/>
-            </a:prstGeom>
-            <a:noFill/>
-            <a:ln cap="flat" cmpd="sng" w="9525">
-              <a:solidFill>
-                <a:schemeClr val="lt1">
-                  <a:alpha val="58431"/>
-                </a:schemeClr>
-              </a:solidFill>
-              <a:prstDash val="solid"/>
-              <a:miter lim="800000"/>
-              <a:headEnd len="sm" w="sm" type="none"/>
-              <a:tailEnd len="sm" w="sm" type="none"/>
-            </a:ln>
-          </p:spPr>
-          <p:txBody>
-            <a:bodyPr anchorCtr="0" anchor="ctr" bIns="25700" lIns="51425" spcFirstLastPara="1" rIns="51425" wrap="square" tIns="25700">
-              <a:noAutofit/>
-            </a:bodyPr>
-            <a:lstStyle/>
-            <a:p>
-              <a:pPr indent="0" lvl="0" marL="0" marR="0" rtl="0" algn="ctr">
-                <a:lnSpc>
-                  <a:spcPct val="100000"/>
-                </a:lnSpc>
-                <a:spcBef>
-                  <a:spcPts val="0"/>
-                </a:spcBef>
-                <a:spcAft>
-                  <a:spcPts val="0"/>
-                </a:spcAft>
-                <a:buClr>
-                  <a:schemeClr val="dk1"/>
-                </a:buClr>
-                <a:buSzPts val="1100"/>
-                <a:buFont typeface="Manrope"/>
-                <a:buNone/>
-              </a:pPr>
-              <a:r>
-                <a:t/>
-              </a:r>
-              <a:endParaRPr b="0" i="0" sz="1100" u="none" cap="none" strike="noStrike">
-                <a:solidFill>
-                  <a:schemeClr val="lt1"/>
-                </a:solidFill>
-                <a:latin typeface="Arial"/>
-                <a:ea typeface="Arial"/>
-                <a:cs typeface="Arial"/>
-                <a:sym typeface="Arial"/>
-              </a:endParaRPr>
-            </a:p>
-          </p:txBody>
-        </p:sp>
-        <p:grpSp>
-          <p:nvGrpSpPr>
-            <p:cNvPr id="88" name="Google Shape;88;p17"/>
-            <p:cNvGrpSpPr/>
-            <p:nvPr/>
-          </p:nvGrpSpPr>
-          <p:grpSpPr>
-            <a:xfrm rot="-2700000">
-              <a:off x="10645147" y="3223767"/>
-              <a:ext cx="227912" cy="160767"/>
-              <a:chOff x="3179128" y="1641228"/>
-              <a:chExt cx="1045800" cy="737700"/>
-            </a:xfrm>
-          </p:grpSpPr>
-          <p:sp>
-            <p:nvSpPr>
-              <p:cNvPr id="89" name="Google Shape;89;p17"/>
-              <p:cNvSpPr/>
-              <p:nvPr/>
-            </p:nvSpPr>
-            <p:spPr>
-              <a:xfrm>
-                <a:off x="3829228" y="1641228"/>
-                <a:ext cx="395700" cy="737700"/>
-              </a:xfrm>
-              <a:prstGeom prst="chevron">
-                <a:avLst>
-                  <a:gd fmla="val 100000" name="adj"/>
-                </a:avLst>
-              </a:prstGeom>
-              <a:solidFill>
-                <a:schemeClr val="accent1"/>
-              </a:solidFill>
-              <a:ln cap="flat" cmpd="sng" w="12700">
-                <a:solidFill>
-                  <a:srgbClr val="FADF4B"/>
-                </a:solidFill>
-                <a:prstDash val="solid"/>
-                <a:miter lim="800000"/>
-                <a:headEnd len="sm" w="sm" type="none"/>
-                <a:tailEnd len="sm" w="sm" type="none"/>
-              </a:ln>
-            </p:spPr>
-            <p:txBody>
-              <a:bodyPr anchorCtr="0" anchor="ctr" bIns="25700" lIns="51425" spcFirstLastPara="1" rIns="51425" wrap="square" tIns="25700">
-                <a:noAutofit/>
-              </a:bodyPr>
-              <a:lstStyle/>
-              <a:p>
-                <a:pPr indent="0" lvl="0" marL="0" marR="0" rtl="0" algn="ctr">
-                  <a:lnSpc>
-                    <a:spcPct val="100000"/>
-                  </a:lnSpc>
-                  <a:spcBef>
-                    <a:spcPts val="0"/>
-                  </a:spcBef>
-                  <a:spcAft>
-                    <a:spcPts val="0"/>
-                  </a:spcAft>
-                  <a:buClr>
-                    <a:schemeClr val="dk1"/>
-                  </a:buClr>
-                  <a:buSzPts val="1100"/>
-                  <a:buFont typeface="Manrope"/>
-                  <a:buNone/>
-                </a:pPr>
-                <a:r>
-                  <a:t/>
-                </a:r>
-                <a:endParaRPr b="0" i="0" sz="1100" u="none" cap="none" strike="noStrike">
-                  <a:solidFill>
-                    <a:schemeClr val="dk1"/>
-                  </a:solidFill>
-                  <a:latin typeface="Arial"/>
-                  <a:ea typeface="Arial"/>
-                  <a:cs typeface="Arial"/>
-                  <a:sym typeface="Arial"/>
-                </a:endParaRPr>
-              </a:p>
-            </p:txBody>
-          </p:sp>
-          <p:cxnSp>
-            <p:nvCxnSpPr>
-              <p:cNvPr id="90" name="Google Shape;90;p17"/>
-              <p:cNvCxnSpPr>
-                <a:stCxn id="89" idx="1"/>
-              </p:cNvCxnSpPr>
-              <p:nvPr/>
-            </p:nvCxnSpPr>
-            <p:spPr>
-              <a:xfrm flipH="1">
-                <a:off x="3179128" y="2010078"/>
-                <a:ext cx="1045800" cy="19800"/>
-              </a:xfrm>
-              <a:prstGeom prst="straightConnector1">
-                <a:avLst/>
-              </a:prstGeom>
-              <a:noFill/>
-              <a:ln cap="flat" cmpd="sng" w="12700">
-                <a:solidFill>
-                  <a:srgbClr val="FADF4B"/>
-                </a:solidFill>
-                <a:prstDash val="solid"/>
-                <a:miter lim="800000"/>
-                <a:headEnd len="sm" w="sm" type="none"/>
-                <a:tailEnd len="sm" w="sm" type="none"/>
-              </a:ln>
-            </p:spPr>
-          </p:cxnSp>
-        </p:grpSp>
-        <p:sp>
-          <p:nvSpPr>
-            <p:cNvPr id="91" name="Google Shape;91;p17"/>
-            <p:cNvSpPr/>
-            <p:nvPr/>
-          </p:nvSpPr>
-          <p:spPr>
-            <a:xfrm>
-              <a:off x="10443265" y="2987104"/>
-              <a:ext cx="637800" cy="637800"/>
-            </a:xfrm>
-            <a:prstGeom prst="arc">
-              <a:avLst>
-                <a:gd fmla="val 16200000" name="adj1"/>
-                <a:gd fmla="val 2547781" name="adj2"/>
-              </a:avLst>
-            </a:prstGeom>
-            <a:noFill/>
-            <a:ln cap="flat" cmpd="sng" w="19050">
-              <a:solidFill>
-                <a:srgbClr val="FADF4B"/>
-              </a:solidFill>
-              <a:prstDash val="solid"/>
-              <a:miter lim="800000"/>
-              <a:headEnd len="sm" w="sm" type="none"/>
-              <a:tailEnd len="sm" w="sm" type="none"/>
-            </a:ln>
-          </p:spPr>
-          <p:txBody>
-            <a:bodyPr anchorCtr="0" anchor="ctr" bIns="25700" lIns="51425" spcFirstLastPara="1" rIns="51425" wrap="square" tIns="25700">
-              <a:noAutofit/>
-            </a:bodyPr>
-            <a:lstStyle/>
-            <a:p>
-              <a:pPr indent="0" lvl="0" marL="0" marR="0" rtl="0" algn="ctr">
-                <a:lnSpc>
-                  <a:spcPct val="100000"/>
-                </a:lnSpc>
-                <a:spcBef>
-                  <a:spcPts val="0"/>
-                </a:spcBef>
-                <a:spcAft>
-                  <a:spcPts val="0"/>
-                </a:spcAft>
-                <a:buClr>
-                  <a:schemeClr val="dk1"/>
-                </a:buClr>
-                <a:buSzPts val="1100"/>
-                <a:buFont typeface="Manrope"/>
-                <a:buNone/>
-              </a:pPr>
-              <a:r>
-                <a:t/>
-              </a:r>
-              <a:endParaRPr b="0" i="0" sz="1100" u="none" cap="none" strike="noStrike">
-                <a:solidFill>
-                  <a:schemeClr val="dk1"/>
-                </a:solidFill>
-                <a:latin typeface="Arial"/>
-                <a:ea typeface="Arial"/>
-                <a:cs typeface="Arial"/>
-                <a:sym typeface="Arial"/>
-              </a:endParaRPr>
-            </a:p>
-          </p:txBody>
-        </p:sp>
-      </p:grpSp>
-    </p:spTree>
-  </p:cSld>
-  <p:clrMapOvr>
-    <a:masterClrMapping/>
-  </p:clrMapOvr>
-</p:sld>
-</file>
-
 <file path=ppt/slides/slide10.xml><?xml version="1.0" encoding="utf-8"?>
 <p:sld xmlns:a="http://schemas.openxmlformats.org/drawingml/2006/main" xmlns:r="http://schemas.openxmlformats.org/officeDocument/2006/relationships" xmlns:mc="http://schemas.openxmlformats.org/markup-compatibility/2006" xmlns:mv="urn:schemas-microsoft-com:mac:vml" xmlns:p="http://schemas.openxmlformats.org/presentationml/2006/main" xmlns:c="http://schemas.openxmlformats.org/drawingml/2006/chart" xmlns:dgm="http://schemas.openxmlformats.org/drawingml/2006/diagram" xmlns:o="urn:schemas-microsoft-com:office:office" xmlns:v="urn:schemas-microsoft-com:vml" xmlns:pvml="urn:schemas-microsoft-com:office:powerpoint" xmlns:com="http://schemas.openxmlformats.org/drawingml/2006/compatibility" xmlns:p14="http://schemas.microsoft.com/office/powerpoint/2010/main" xmlns:p15="http://schemas.microsoft.com/office/powerpoint/2012/main" xmlns:ahyp="http://schemas.microsoft.com/office/drawing/2018/hyperlinkcolor">
   <p:cSld>
@@ -10584,7 +9432,7 @@
                   <a:cs typeface="Arial"/>
                   <a:sym typeface="Arial"/>
                 </a:rPr>
-                <a:t>Дараагийн алхмуудаа тодорхой төлөвлөнө. </a:t>
+                <a:t>Хэрэглэгчийн хэрэгцээг нарийн судална. </a:t>
               </a:r>
               <a:endParaRPr/>
             </a:p>
@@ -10616,7 +9464,7 @@
                   <a:cs typeface="Arial"/>
                   <a:sym typeface="Arial"/>
                 </a:rPr>
-                <a:t>Өсөлтийг тогтмол хэмжиж, сайжруулна. </a:t>
+                <a:t>Чанар, хурд, найдвартай байдлыг эрхэмлэнэ. </a:t>
               </a:r>
               <a:endParaRPr/>
             </a:p>
@@ -10669,7 +9517,7 @@
                   <a:cs typeface="Arial"/>
                   <a:sym typeface="Arial"/>
                 </a:rPr>
-                <a:t>САНАА</a:t>
+                <a:t>ТАЙЛБАР</a:t>
               </a:r>
               <a:endParaRPr/>
             </a:p>
@@ -10898,7 +9746,7 @@
                   <a:cs typeface="Arial"/>
                   <a:sym typeface="Arial"/>
                 </a:rPr>
-                <a:t>Гол үзүүлэлтүүдээ товч дурдана. </a:t>
+                <a:t>Үр дүнд суурилсан шийдлийг санал болгоно. </a:t>
               </a:r>
               <a:endParaRPr/>
             </a:p>
@@ -10930,7 +9778,7 @@
                   <a:cs typeface="Arial"/>
                   <a:sym typeface="Arial"/>
                 </a:rPr>
-                <a:t>Хэрэглэгчийн хэрэгцээг нарийн судална. </a:t>
+                <a:t>Харилцагчидтайгаа урт хугацааны түншлэл тогтооно. </a:t>
               </a:r>
               <a:endParaRPr/>
             </a:p>
@@ -10983,7 +9831,7 @@
                   <a:cs typeface="Arial"/>
                   <a:sym typeface="Arial"/>
                 </a:rPr>
-                <a:t>АГУУЛГА</a:t>
+                <a:t>ҮР ДҮН</a:t>
               </a:r>
               <a:endParaRPr/>
             </a:p>
@@ -11212,7 +10060,7 @@
                   <a:cs typeface="Arial"/>
                   <a:sym typeface="Arial"/>
                 </a:rPr>
-                <a:t>Шинэ боломжийг цаг алдалгүй ашиглана. </a:t>
+                <a:t>Энд гол санаагаа бичнэ үү. </a:t>
               </a:r>
               <a:endParaRPr/>
             </a:p>
@@ -11244,7 +10092,7 @@
                   <a:cs typeface="Arial"/>
                   <a:sym typeface="Arial"/>
                 </a:rPr>
-                <a:t>Үр дүнд суурилсан шийдлийг санал болгоно. </a:t>
+                <a:t>Товч бөгөөд ойлгомжтой тайлбар. </a:t>
               </a:r>
               <a:endParaRPr/>
             </a:p>
@@ -11297,7 +10145,7 @@
                   <a:cs typeface="Arial"/>
                   <a:sym typeface="Arial"/>
                 </a:rPr>
-                <a:t>САНАА</a:t>
+                <a:t>ТАЙЛБАР</a:t>
               </a:r>
               <a:endParaRPr/>
             </a:p>
@@ -11526,7 +10374,7 @@
                   <a:cs typeface="Arial"/>
                   <a:sym typeface="Arial"/>
                 </a:rPr>
-                <a:t>Технологийн шинэчлэлийг тасралтгүй нэвтрүүлнэ. </a:t>
+                <a:t>Тоо баримт, жишээ ашиглавал илүү үр дүнтэй. </a:t>
               </a:r>
               <a:endParaRPr/>
             </a:p>
@@ -11558,7 +10406,7 @@
                   <a:cs typeface="Arial"/>
                   <a:sym typeface="Arial"/>
                 </a:rPr>
-                <a:t>Энд гол санаагаа бичнэ үү. </a:t>
+                <a:t>Бид хэрэглэгчдэдээ үнэ цэн бүтээхийг зорьдог. </a:t>
               </a:r>
               <a:endParaRPr/>
             </a:p>
@@ -11611,7 +10459,7 @@
                   <a:cs typeface="Arial"/>
                   <a:sym typeface="Arial"/>
                 </a:rPr>
-                <a:t>АГУУЛГА</a:t>
+                <a:t>ҮР ДҮН</a:t>
               </a:r>
               <a:endParaRPr/>
             </a:p>
@@ -20951,7 +19799,7 @@
                 <a:cs typeface="Arial"/>
                 <a:sym typeface="Arial"/>
               </a:rPr>
-              <a:t>Хэрэглэгчийн хэрэгцээг нарийн судална </a:t>
+              <a:t>Харилцагчидтайгаа урт хугацааны түншлэл тогтооно </a:t>
             </a:r>
             <a:endParaRPr/>
           </a:p>
@@ -24019,7 +22867,7 @@
                   <a:cs typeface="Arial"/>
                   <a:sym typeface="Arial"/>
                 </a:rPr>
-                <a:t>Чанар, хурд, найдвартай байдлыг эрхэмлэнэ. Шинэ боломжийг цаг алдалгүй ашиглана.</a:t>
+                <a:t>Технологийн шинэчлэлийг тасралтгүй нэвтрүүлнэ. Энд гол санаагаа бичнэ үү.</a:t>
               </a:r>
               <a:endParaRPr b="0" i="0" sz="1100" u="none" cap="none" strike="noStrike">
                 <a:solidFill>
@@ -24166,7 +23014,7 @@
                   <a:cs typeface="Arial"/>
                   <a:sym typeface="Arial"/>
                 </a:rPr>
-                <a:t>Харилцагчидтайгаа урт хугацааны түншлэл тогтооно.</a:t>
+                <a:t>Үзэгчдэд хэрэгтэй мэдээллийг өгнө. Тоо баримт, жишээ ашиглавал илүү үр дүнтэй.</a:t>
               </a:r>
               <a:endParaRPr b="0" i="0" sz="1100" u="none" cap="none" strike="noStrike">
                 <a:solidFill>
@@ -24232,7 +23080,7 @@
                   <a:cs typeface="Arial"/>
                   <a:sym typeface="Arial"/>
                 </a:rPr>
-                <a:t>Гол санаа энд</a:t>
+                <a:t>Товч тайлбар энд</a:t>
               </a:r>
               <a:endParaRPr b="1" i="0" sz="1400" u="none" cap="none" strike="noStrike">
                 <a:solidFill>
@@ -24313,7 +23161,7 @@
                   <a:cs typeface="Arial"/>
                   <a:sym typeface="Arial"/>
                 </a:rPr>
-                <a:t>Энд гол санаагаа бичнэ үү. Товч бөгөөд ойлгомжтой тайлбар.</a:t>
+                <a:t>Төслийн явц, үр дүнг энд харуулна. Багаараа хамтран шинэ шийдэл хэрэгжүүлнэ.</a:t>
               </a:r>
               <a:endParaRPr b="0" i="0" sz="1100" u="none" cap="none" strike="noStrike">
                 <a:solidFill>
@@ -24379,7 +23227,7 @@
                   <a:cs typeface="Arial"/>
                   <a:sym typeface="Arial"/>
                 </a:rPr>
-                <a:t>Дэд гарчиг энд</a:t>
+                <a:t>Гол санаа энд</a:t>
               </a:r>
               <a:endParaRPr b="1" i="0" sz="1400" u="none" cap="none" strike="noStrike">
                 <a:solidFill>
@@ -24460,7 +23308,7 @@
                   <a:cs typeface="Arial"/>
                   <a:sym typeface="Arial"/>
                 </a:rPr>
-                <a:t>Тоо баримт, жишээ ашиглавал илүү үр дүнтэй.</a:t>
+                <a:t>Дараагийн алхмуудаа тодорхой төлөвлөнө. Өсөлтийг тогтмол хэмжиж, сайжруулна.</a:t>
               </a:r>
               <a:endParaRPr b="0" i="0" sz="1100" u="none" cap="none" strike="noStrike">
                 <a:solidFill>
@@ -24526,7 +23374,7 @@
                   <a:cs typeface="Arial"/>
                   <a:sym typeface="Arial"/>
                 </a:rPr>
-                <a:t>Товч тайлбар энд</a:t>
+                <a:t>Дэд гарчиг энд</a:t>
               </a:r>
               <a:endParaRPr b="1" i="0" sz="1400" u="none" cap="none" strike="noStrike">
                 <a:solidFill>
@@ -25001,7 +23849,7 @@
                 <a:cs typeface="Arial"/>
                 <a:sym typeface="Arial"/>
               </a:rPr>
-              <a:t>Өсөлтийг тогтмол хэмжиж, сайжруулна. Энэ хэсэгт өөрийн текстээ оруулна уу. Гол үзүүлэлтүүдээ товч дурдана.</a:t>
+              <a:t>Шинэ боломжийг цаг алдалгүй ашиглана. Үр дүнд суурилсан шийдлийг санал болгоно. Харилцагчидтайгаа урт хугацааны түншлэл тогтооно.</a:t>
             </a:r>
             <a:endParaRPr/>
           </a:p>
@@ -25054,7 +23902,7 @@
                 <a:cs typeface="Arial"/>
                 <a:sym typeface="Arial"/>
               </a:rPr>
-              <a:t>Хэрэглэгчийн хэрэгцээг нарийн судална. Чанар, хурд, найдвартай байдлыг эрхэмлэнэ. Шинэ боломжийг цаг алдалгүй ашиглана.</a:t>
+              <a:t>Технологийн шинэчлэлийг тасралтгүй нэвтрүүлнэ. Энд гол санаагаа бичнэ үү. Товч бөгөөд ойлгомжтой тайлбар.</a:t>
             </a:r>
             <a:endParaRPr/>
           </a:p>
@@ -25107,7 +23955,7 @@
                 <a:cs typeface="Arial"/>
                 <a:sym typeface="Arial"/>
               </a:rPr>
-              <a:t>Үр дүнд суурилсан шийдлийг санал болгоно. Харилцагчидтайгаа урт хугацааны түншлэл тогтооно.</a:t>
+              <a:t>Үзэгчдэд хэрэгтэй мэдээллийг өгнө. Тоо баримт, жишээ ашиглавал илүү үр дүнтэй. Бид хэрэглэгчдэдээ үнэ цэн бүтээхийг зорьдог.</a:t>
             </a:r>
             <a:endParaRPr/>
           </a:p>
@@ -25160,7 +24008,7 @@
                 <a:cs typeface="Arial"/>
                 <a:sym typeface="Arial"/>
               </a:rPr>
-              <a:t>Технологийн шинэчлэлийг тасралтгүй нэвтрүүлнэ. Энд гол санаагаа бичнэ үү. Товч бөгөөд ойлгомжтой тайлбар.</a:t>
+              <a:t>Төслийн явц, үр дүнг энд харуулна. Багаараа хамтран шинэ шийдэл хэрэгжүүлнэ. Зах зээлийн судалгаанд үндэслэн шийдвэр гаргана.</a:t>
             </a:r>
             <a:endParaRPr/>
           </a:p>
@@ -34892,6 +33740,2300 @@
 </p:sld>
 </file>
 
+<file path=ppt/slides/slide13.xml><?xml version="1.0" encoding="utf-8"?>
+<p:sld xmlns:a="http://schemas.openxmlformats.org/drawingml/2006/main" xmlns:r="http://schemas.openxmlformats.org/officeDocument/2006/relationships" xmlns:mc="http://schemas.openxmlformats.org/markup-compatibility/2006" xmlns:mv="urn:schemas-microsoft-com:mac:vml" xmlns:p="http://schemas.openxmlformats.org/presentationml/2006/main" xmlns:c="http://schemas.openxmlformats.org/drawingml/2006/chart" xmlns:dgm="http://schemas.openxmlformats.org/drawingml/2006/diagram" xmlns:o="urn:schemas-microsoft-com:office:office" xmlns:v="urn:schemas-microsoft-com:vml" xmlns:pvml="urn:schemas-microsoft-com:office:powerpoint" xmlns:com="http://schemas.openxmlformats.org/drawingml/2006/compatibility" xmlns:p14="http://schemas.microsoft.com/office/powerpoint/2010/main" xmlns:p15="http://schemas.microsoft.com/office/powerpoint/2012/main" xmlns:ahyp="http://schemas.microsoft.com/office/drawing/2018/hyperlinkcolor">
+  <p:cSld>
+    <p:spTree>
+      <p:nvGrpSpPr>
+        <p:cNvPr id="71" name="Shape 71"/>
+        <p:cNvGrpSpPr/>
+        <p:nvPr/>
+      </p:nvGrpSpPr>
+      <p:grpSpPr>
+        <a:xfrm>
+          <a:off x="0" y="0"/>
+          <a:ext cx="0" cy="0"/>
+          <a:chOff x="0" y="0"/>
+          <a:chExt cx="0" cy="0"/>
+        </a:xfrm>
+      </p:grpSpPr>
+      <p:sp>
+        <p:nvSpPr>
+          <p:cNvPr id="72" name="Google Shape;72;p17"/>
+          <p:cNvSpPr/>
+          <p:nvPr/>
+        </p:nvSpPr>
+        <p:spPr>
+          <a:xfrm flipH="1">
+            <a:off x="0" y="-3"/>
+            <a:ext cx="9144000" cy="5143497"/>
+          </a:xfrm>
+          <a:prstGeom prst="rect">
+            <a:avLst/>
+          </a:prstGeom>
+          <a:gradFill>
+            <a:gsLst>
+              <a:gs pos="0">
+                <a:srgbClr val="FADF4B"/>
+              </a:gs>
+              <a:gs pos="29000">
+                <a:srgbClr val="05121A"/>
+              </a:gs>
+              <a:gs pos="100000">
+                <a:srgbClr val="05121A"/>
+              </a:gs>
+            </a:gsLst>
+            <a:path path="circle">
+              <a:fillToRect b="0%" l="100%" r="0%" t="100%"/>
+            </a:path>
+            <a:tileRect b="-100%" l="0%" r="-100%" t="0%"/>
+          </a:gradFill>
+          <a:ln>
+            <a:noFill/>
+          </a:ln>
+        </p:spPr>
+        <p:txBody>
+          <a:bodyPr anchorCtr="0" anchor="ctr" bIns="34275" lIns="68575" spcFirstLastPara="1" rIns="68575" wrap="square" tIns="34275">
+            <a:noAutofit/>
+          </a:bodyPr>
+          <a:lstStyle/>
+          <a:p>
+            <a:pPr indent="0" lvl="0" marL="0" marR="0" rtl="0" algn="ctr">
+              <a:lnSpc>
+                <a:spcPct val="100000"/>
+              </a:lnSpc>
+              <a:spcBef>
+                <a:spcPts val="0"/>
+              </a:spcBef>
+              <a:spcAft>
+                <a:spcPts val="0"/>
+              </a:spcAft>
+              <a:buClr>
+                <a:srgbClr val="000000"/>
+              </a:buClr>
+              <a:buSzPts val="1400"/>
+              <a:buFont typeface="Arial"/>
+              <a:buNone/>
+            </a:pPr>
+            <a:r>
+              <a:t/>
+            </a:r>
+            <a:endParaRPr b="0" i="0" sz="1400" u="none" cap="none" strike="noStrike">
+              <a:solidFill>
+                <a:schemeClr val="lt1"/>
+              </a:solidFill>
+              <a:latin typeface="Manrope"/>
+              <a:ea typeface="Manrope"/>
+              <a:cs typeface="Manrope"/>
+              <a:sym typeface="Manrope"/>
+            </a:endParaRPr>
+          </a:p>
+        </p:txBody>
+      </p:sp>
+      <p:sp>
+        <p:nvSpPr>
+          <p:cNvPr id="73" name="Google Shape;73;p17"/>
+          <p:cNvSpPr/>
+          <p:nvPr/>
+        </p:nvSpPr>
+        <p:spPr>
+          <a:xfrm>
+            <a:off x="5267330" y="3038478"/>
+            <a:ext cx="3876676" cy="2105022"/>
+          </a:xfrm>
+          <a:prstGeom prst="rect">
+            <a:avLst/>
+          </a:prstGeom>
+          <a:gradFill>
+            <a:gsLst>
+              <a:gs pos="0">
+                <a:srgbClr val="FADF4B"/>
+              </a:gs>
+              <a:gs pos="26000">
+                <a:srgbClr val="05121A"/>
+              </a:gs>
+              <a:gs pos="100000">
+                <a:srgbClr val="05121A"/>
+              </a:gs>
+            </a:gsLst>
+            <a:path path="circle">
+              <a:fillToRect b="0%" l="100%" r="0%" t="100%"/>
+            </a:path>
+            <a:tileRect b="-100%" l="0%" r="-100%" t="0%"/>
+          </a:gradFill>
+          <a:ln>
+            <a:noFill/>
+          </a:ln>
+        </p:spPr>
+        <p:txBody>
+          <a:bodyPr anchorCtr="0" anchor="ctr" bIns="34275" lIns="68575" spcFirstLastPara="1" rIns="68575" wrap="square" tIns="34275">
+            <a:noAutofit/>
+          </a:bodyPr>
+          <a:lstStyle/>
+          <a:p>
+            <a:pPr indent="0" lvl="0" marL="0" marR="0" rtl="0" algn="ctr">
+              <a:lnSpc>
+                <a:spcPct val="100000"/>
+              </a:lnSpc>
+              <a:spcBef>
+                <a:spcPts val="0"/>
+              </a:spcBef>
+              <a:spcAft>
+                <a:spcPts val="0"/>
+              </a:spcAft>
+              <a:buClr>
+                <a:srgbClr val="000000"/>
+              </a:buClr>
+              <a:buSzPts val="1400"/>
+              <a:buFont typeface="Arial"/>
+              <a:buNone/>
+            </a:pPr>
+            <a:r>
+              <a:t/>
+            </a:r>
+            <a:endParaRPr b="0" i="0" sz="1400" u="none" cap="none" strike="noStrike">
+              <a:solidFill>
+                <a:schemeClr val="lt1"/>
+              </a:solidFill>
+              <a:latin typeface="Manrope"/>
+              <a:ea typeface="Manrope"/>
+              <a:cs typeface="Manrope"/>
+              <a:sym typeface="Manrope"/>
+            </a:endParaRPr>
+          </a:p>
+        </p:txBody>
+      </p:sp>
+      <p:sp>
+        <p:nvSpPr>
+          <p:cNvPr id="74" name="Google Shape;74;p17"/>
+          <p:cNvSpPr/>
+          <p:nvPr/>
+        </p:nvSpPr>
+        <p:spPr>
+          <a:xfrm rot="5400000">
+            <a:off x="379570" y="-392802"/>
+            <a:ext cx="1881188" cy="2640332"/>
+          </a:xfrm>
+          <a:prstGeom prst="flowChartManualInput">
+            <a:avLst/>
+          </a:prstGeom>
+          <a:gradFill>
+            <a:gsLst>
+              <a:gs pos="0">
+                <a:schemeClr val="accent3"/>
+              </a:gs>
+              <a:gs pos="38000">
+                <a:srgbClr val="FADF4B"/>
+              </a:gs>
+              <a:gs pos="67000">
+                <a:srgbClr val="2B3A42"/>
+              </a:gs>
+              <a:gs pos="100000">
+                <a:srgbClr val="05121A"/>
+              </a:gs>
+            </a:gsLst>
+            <a:path path="circle">
+              <a:fillToRect b="100%" l="100%" r="0%" t="0%"/>
+            </a:path>
+            <a:tileRect b="0%" l="0%" r="-100%" t="-100%"/>
+          </a:gradFill>
+          <a:ln>
+            <a:noFill/>
+          </a:ln>
+        </p:spPr>
+        <p:txBody>
+          <a:bodyPr anchorCtr="0" anchor="ctr" bIns="34275" lIns="68575" spcFirstLastPara="1" rIns="68575" wrap="square" tIns="34275">
+            <a:noAutofit/>
+          </a:bodyPr>
+          <a:lstStyle/>
+          <a:p>
+            <a:pPr indent="0" lvl="0" marL="0" marR="0" rtl="0" algn="ctr">
+              <a:lnSpc>
+                <a:spcPct val="100000"/>
+              </a:lnSpc>
+              <a:spcBef>
+                <a:spcPts val="0"/>
+              </a:spcBef>
+              <a:spcAft>
+                <a:spcPts val="0"/>
+              </a:spcAft>
+              <a:buClr>
+                <a:srgbClr val="000000"/>
+              </a:buClr>
+              <a:buSzPts val="1400"/>
+              <a:buFont typeface="Arial"/>
+              <a:buNone/>
+            </a:pPr>
+            <a:r>
+              <a:t/>
+            </a:r>
+            <a:endParaRPr b="0" i="0" sz="1400" u="none" cap="none" strike="noStrike">
+              <a:solidFill>
+                <a:schemeClr val="lt1"/>
+              </a:solidFill>
+              <a:latin typeface="Manrope"/>
+              <a:ea typeface="Manrope"/>
+              <a:cs typeface="Manrope"/>
+              <a:sym typeface="Manrope"/>
+            </a:endParaRPr>
+          </a:p>
+        </p:txBody>
+      </p:sp>
+      <p:sp>
+        <p:nvSpPr>
+          <p:cNvPr id="75" name="Google Shape;75;p17"/>
+          <p:cNvSpPr/>
+          <p:nvPr/>
+        </p:nvSpPr>
+        <p:spPr>
+          <a:xfrm flipH="1">
+            <a:off x="1959429" y="0"/>
+            <a:ext cx="7184574" cy="5143497"/>
+          </a:xfrm>
+          <a:custGeom>
+            <a:rect b="b" l="l" r="r" t="t"/>
+            <a:pathLst>
+              <a:path extrusionOk="0" h="6857996" w="9579432">
+                <a:moveTo>
+                  <a:pt x="0" y="0"/>
+                </a:moveTo>
+                <a:lnTo>
+                  <a:pt x="9579432" y="0"/>
+                </a:lnTo>
+                <a:lnTo>
+                  <a:pt x="9579431" y="4"/>
+                </a:lnTo>
+                <a:lnTo>
+                  <a:pt x="3913990" y="4"/>
+                </a:lnTo>
+                <a:lnTo>
+                  <a:pt x="4570139" y="1768319"/>
+                </a:lnTo>
+                <a:cubicBezTo>
+                  <a:pt x="4570139" y="1768319"/>
+                  <a:pt x="4938048" y="2505077"/>
+                  <a:pt x="5705107" y="2505077"/>
+                </a:cubicBezTo>
+                <a:lnTo>
+                  <a:pt x="8676383" y="2505077"/>
+                </a:lnTo>
+                <a:lnTo>
+                  <a:pt x="7107210" y="6857996"/>
+                </a:lnTo>
+                <a:lnTo>
+                  <a:pt x="1136912" y="6857996"/>
+                </a:lnTo>
+                <a:lnTo>
+                  <a:pt x="0" y="3704178"/>
+                </a:lnTo>
+                <a:lnTo>
+                  <a:pt x="0" y="0"/>
+                </a:lnTo>
+                <a:close/>
+              </a:path>
+            </a:pathLst>
+          </a:custGeom>
+          <a:gradFill>
+            <a:gsLst>
+              <a:gs pos="0">
+                <a:schemeClr val="accent3"/>
+              </a:gs>
+              <a:gs pos="44000">
+                <a:srgbClr val="FADF4B"/>
+              </a:gs>
+              <a:gs pos="67000">
+                <a:srgbClr val="2B3A42"/>
+              </a:gs>
+              <a:gs pos="100000">
+                <a:srgbClr val="05121A"/>
+              </a:gs>
+            </a:gsLst>
+            <a:path path="circle">
+              <a:fillToRect b="100%" l="100%" r="0%" t="0%"/>
+            </a:path>
+            <a:tileRect b="0%" l="0%" r="-100%" t="-100%"/>
+          </a:gradFill>
+          <a:ln>
+            <a:noFill/>
+          </a:ln>
+        </p:spPr>
+        <p:txBody>
+          <a:bodyPr anchorCtr="0" anchor="ctr" bIns="34275" lIns="68575" spcFirstLastPara="1" rIns="68575" wrap="square" tIns="34275">
+            <a:noAutofit/>
+          </a:bodyPr>
+          <a:lstStyle/>
+          <a:p>
+            <a:pPr indent="0" lvl="0" marL="0" marR="0" rtl="0" algn="ctr">
+              <a:lnSpc>
+                <a:spcPct val="100000"/>
+              </a:lnSpc>
+              <a:spcBef>
+                <a:spcPts val="0"/>
+              </a:spcBef>
+              <a:spcAft>
+                <a:spcPts val="0"/>
+              </a:spcAft>
+              <a:buClr>
+                <a:srgbClr val="000000"/>
+              </a:buClr>
+              <a:buSzPts val="1400"/>
+              <a:buFont typeface="Arial"/>
+              <a:buNone/>
+            </a:pPr>
+            <a:r>
+              <a:t/>
+            </a:r>
+            <a:endParaRPr b="0" i="0" sz="1400" u="none" cap="none" strike="noStrike">
+              <a:solidFill>
+                <a:schemeClr val="lt1"/>
+              </a:solidFill>
+              <a:latin typeface="Manrope"/>
+              <a:ea typeface="Manrope"/>
+              <a:cs typeface="Manrope"/>
+              <a:sym typeface="Manrope"/>
+            </a:endParaRPr>
+          </a:p>
+        </p:txBody>
+      </p:sp>
+      <p:sp>
+        <p:nvSpPr>
+          <p:cNvPr id="76" name="Google Shape;76;p17"/>
+          <p:cNvSpPr/>
+          <p:nvPr/>
+        </p:nvSpPr>
+        <p:spPr>
+          <a:xfrm flipH="1">
+            <a:off x="1937998" y="0"/>
+            <a:ext cx="7184574" cy="5143497"/>
+          </a:xfrm>
+          <a:custGeom>
+            <a:rect b="b" l="l" r="r" t="t"/>
+            <a:pathLst>
+              <a:path extrusionOk="0" h="6857996" w="9579432">
+                <a:moveTo>
+                  <a:pt x="0" y="0"/>
+                </a:moveTo>
+                <a:lnTo>
+                  <a:pt x="9579432" y="0"/>
+                </a:lnTo>
+                <a:lnTo>
+                  <a:pt x="9579431" y="4"/>
+                </a:lnTo>
+                <a:lnTo>
+                  <a:pt x="3913990" y="4"/>
+                </a:lnTo>
+                <a:lnTo>
+                  <a:pt x="4570139" y="1768319"/>
+                </a:lnTo>
+                <a:cubicBezTo>
+                  <a:pt x="4570139" y="1768319"/>
+                  <a:pt x="4938048" y="2505077"/>
+                  <a:pt x="5705107" y="2505077"/>
+                </a:cubicBezTo>
+                <a:lnTo>
+                  <a:pt x="8676383" y="2505077"/>
+                </a:lnTo>
+                <a:lnTo>
+                  <a:pt x="7107210" y="6857996"/>
+                </a:lnTo>
+                <a:lnTo>
+                  <a:pt x="1136912" y="6857996"/>
+                </a:lnTo>
+                <a:lnTo>
+                  <a:pt x="0" y="3704178"/>
+                </a:lnTo>
+                <a:lnTo>
+                  <a:pt x="0" y="0"/>
+                </a:lnTo>
+                <a:close/>
+              </a:path>
+            </a:pathLst>
+          </a:custGeom>
+          <a:gradFill>
+            <a:gsLst>
+              <a:gs pos="0">
+                <a:srgbClr val="05121A"/>
+              </a:gs>
+              <a:gs pos="43000">
+                <a:srgbClr val="2B3A42"/>
+              </a:gs>
+              <a:gs pos="67000">
+                <a:srgbClr val="2B3A42"/>
+              </a:gs>
+              <a:gs pos="100000">
+                <a:srgbClr val="05121A">
+                  <a:alpha val="0"/>
+                </a:srgbClr>
+              </a:gs>
+            </a:gsLst>
+            <a:path path="circle">
+              <a:fillToRect b="100%" l="0%" r="100%" t="0%"/>
+            </a:path>
+            <a:tileRect b="0%" l="-100%" r="0%" t="-100%"/>
+          </a:gradFill>
+          <a:ln>
+            <a:noFill/>
+          </a:ln>
+        </p:spPr>
+        <p:txBody>
+          <a:bodyPr anchorCtr="0" anchor="ctr" bIns="34275" lIns="68575" spcFirstLastPara="1" rIns="68575" wrap="square" tIns="34275">
+            <a:noAutofit/>
+          </a:bodyPr>
+          <a:lstStyle/>
+          <a:p>
+            <a:pPr indent="0" lvl="0" marL="0" marR="0" rtl="0" algn="ctr">
+              <a:lnSpc>
+                <a:spcPct val="100000"/>
+              </a:lnSpc>
+              <a:spcBef>
+                <a:spcPts val="0"/>
+              </a:spcBef>
+              <a:spcAft>
+                <a:spcPts val="0"/>
+              </a:spcAft>
+              <a:buClr>
+                <a:srgbClr val="000000"/>
+              </a:buClr>
+              <a:buSzPts val="1400"/>
+              <a:buFont typeface="Arial"/>
+              <a:buNone/>
+            </a:pPr>
+            <a:r>
+              <a:t/>
+            </a:r>
+            <a:endParaRPr b="0" i="0" sz="1400" u="none" cap="none" strike="noStrike">
+              <a:solidFill>
+                <a:schemeClr val="lt1"/>
+              </a:solidFill>
+              <a:latin typeface="Manrope"/>
+              <a:ea typeface="Manrope"/>
+              <a:cs typeface="Manrope"/>
+              <a:sym typeface="Manrope"/>
+            </a:endParaRPr>
+          </a:p>
+        </p:txBody>
+      </p:sp>
+      <p:grpSp>
+        <p:nvGrpSpPr>
+          <p:cNvPr id="77" name="Google Shape;77;p17"/>
+          <p:cNvGrpSpPr/>
+          <p:nvPr/>
+        </p:nvGrpSpPr>
+        <p:grpSpPr>
+          <a:xfrm flipH="1">
+            <a:off x="487260" y="-147"/>
+            <a:ext cx="3944541" cy="3257841"/>
+            <a:chOff x="4712199" y="-350860"/>
+            <a:chExt cx="3944541" cy="3257841"/>
+          </a:xfrm>
+        </p:grpSpPr>
+        <p:cxnSp>
+          <p:nvCxnSpPr>
+            <p:cNvPr id="78" name="Google Shape;78;p17"/>
+            <p:cNvCxnSpPr>
+              <a:endCxn id="79" idx="2"/>
+            </p:cNvCxnSpPr>
+            <p:nvPr/>
+          </p:nvCxnSpPr>
+          <p:spPr>
+            <a:xfrm>
+              <a:off x="4712199" y="2906980"/>
+              <a:ext cx="3733800" cy="0"/>
+            </a:xfrm>
+            <a:prstGeom prst="straightConnector1">
+              <a:avLst/>
+            </a:prstGeom>
+            <a:noFill/>
+            <a:ln cap="flat" cmpd="sng" w="12700">
+              <a:solidFill>
+                <a:schemeClr val="lt1">
+                  <a:alpha val="32941"/>
+                </a:schemeClr>
+              </a:solidFill>
+              <a:prstDash val="solid"/>
+              <a:miter lim="800000"/>
+              <a:headEnd len="sm" w="sm" type="none"/>
+              <a:tailEnd len="sm" w="sm" type="none"/>
+            </a:ln>
+          </p:spPr>
+        </p:cxnSp>
+        <p:cxnSp>
+          <p:nvCxnSpPr>
+            <p:cNvPr id="80" name="Google Shape;80;p17"/>
+            <p:cNvCxnSpPr>
+              <a:endCxn id="79" idx="0"/>
+            </p:cNvCxnSpPr>
+            <p:nvPr/>
+          </p:nvCxnSpPr>
+          <p:spPr>
+            <a:xfrm>
+              <a:off x="8656739" y="-350860"/>
+              <a:ext cx="0" cy="3047100"/>
+            </a:xfrm>
+            <a:prstGeom prst="straightConnector1">
+              <a:avLst/>
+            </a:prstGeom>
+            <a:noFill/>
+            <a:ln cap="flat" cmpd="sng" w="12700">
+              <a:solidFill>
+                <a:srgbClr val="EDF1FF">
+                  <a:alpha val="32941"/>
+                </a:srgbClr>
+              </a:solidFill>
+              <a:prstDash val="solid"/>
+              <a:miter lim="800000"/>
+              <a:headEnd len="sm" w="sm" type="none"/>
+              <a:tailEnd len="sm" w="sm" type="none"/>
+            </a:ln>
+          </p:spPr>
+        </p:cxnSp>
+        <p:sp>
+          <p:nvSpPr>
+            <p:cNvPr id="79" name="Google Shape;79;p17"/>
+            <p:cNvSpPr/>
+            <p:nvPr/>
+          </p:nvSpPr>
+          <p:spPr>
+            <a:xfrm rot="5400000">
+              <a:off x="8235258" y="2485499"/>
+              <a:ext cx="421481" cy="421481"/>
+            </a:xfrm>
+            <a:prstGeom prst="arc">
+              <a:avLst>
+                <a:gd fmla="val 16200000" name="adj1"/>
+                <a:gd fmla="val 0" name="adj2"/>
+              </a:avLst>
+            </a:prstGeom>
+            <a:noFill/>
+            <a:ln cap="flat" cmpd="sng" w="12700">
+              <a:solidFill>
+                <a:schemeClr val="lt1">
+                  <a:alpha val="32941"/>
+                </a:schemeClr>
+              </a:solidFill>
+              <a:prstDash val="solid"/>
+              <a:miter lim="800000"/>
+              <a:headEnd len="sm" w="sm" type="none"/>
+              <a:tailEnd len="sm" w="sm" type="none"/>
+            </a:ln>
+          </p:spPr>
+          <p:txBody>
+            <a:bodyPr anchorCtr="0" anchor="ctr" bIns="34275" lIns="68575" spcFirstLastPara="1" rIns="68575" wrap="square" tIns="34275">
+              <a:noAutofit/>
+            </a:bodyPr>
+            <a:lstStyle/>
+            <a:p>
+              <a:pPr indent="0" lvl="0" marL="0" marR="0" rtl="0" algn="ctr">
+                <a:lnSpc>
+                  <a:spcPct val="100000"/>
+                </a:lnSpc>
+                <a:spcBef>
+                  <a:spcPts val="0"/>
+                </a:spcBef>
+                <a:spcAft>
+                  <a:spcPts val="0"/>
+                </a:spcAft>
+                <a:buClr>
+                  <a:srgbClr val="000000"/>
+                </a:buClr>
+                <a:buSzPts val="1400"/>
+                <a:buFont typeface="Arial"/>
+                <a:buNone/>
+              </a:pPr>
+              <a:r>
+                <a:t/>
+              </a:r>
+              <a:endParaRPr b="0" i="0" sz="1400" u="none" cap="none" strike="noStrike">
+                <a:solidFill>
+                  <a:schemeClr val="dk1"/>
+                </a:solidFill>
+                <a:latin typeface="Manrope"/>
+                <a:ea typeface="Manrope"/>
+                <a:cs typeface="Manrope"/>
+                <a:sym typeface="Manrope"/>
+              </a:endParaRPr>
+            </a:p>
+          </p:txBody>
+        </p:sp>
+      </p:grpSp>
+      <p:pic>
+        <p:nvPicPr>
+          <p:cNvPr id="81" name="Google Shape;81;p17"/>
+          <p:cNvPicPr preferRelativeResize="0"/>
+          <p:nvPr/>
+        </p:nvPicPr>
+        <p:blipFill rotWithShape="1">
+          <a:blip r:embed="rId3">
+            <a:alphaModFix/>
+          </a:blip>
+          <a:srcRect b="11716" l="0" r="0" t="15703"/>
+          <a:stretch/>
+        </p:blipFill>
+        <p:spPr>
+          <a:xfrm flipH="1" rot="13563727">
+            <a:off x="2630042" y="-1604313"/>
+            <a:ext cx="4403381" cy="6394153"/>
+          </a:xfrm>
+          <a:custGeom>
+            <a:rect b="b" l="l" r="r" t="t"/>
+            <a:pathLst>
+              <a:path extrusionOk="0" h="8525537" w="5871174">
+                <a:moveTo>
+                  <a:pt x="4093990" y="8525537"/>
+                </a:moveTo>
+                <a:lnTo>
+                  <a:pt x="0" y="4276878"/>
+                </a:lnTo>
+                <a:lnTo>
+                  <a:pt x="0" y="4276873"/>
+                </a:lnTo>
+                <a:lnTo>
+                  <a:pt x="2679906" y="7058024"/>
+                </a:lnTo>
+                <a:lnTo>
+                  <a:pt x="3497969" y="5358541"/>
+                </a:lnTo>
+                <a:cubicBezTo>
+                  <a:pt x="3497969" y="5358541"/>
+                  <a:pt x="3773219" y="4582393"/>
+                  <a:pt x="3240973" y="4030039"/>
+                </a:cubicBezTo>
+                <a:lnTo>
+                  <a:pt x="1179270" y="1890446"/>
+                </a:lnTo>
+                <a:lnTo>
+                  <a:pt x="5402589" y="0"/>
+                </a:lnTo>
+                <a:lnTo>
+                  <a:pt x="5871174" y="486288"/>
+                </a:lnTo>
+                <a:lnTo>
+                  <a:pt x="5871174" y="8525537"/>
+                </a:lnTo>
+                <a:close/>
+              </a:path>
+            </a:pathLst>
+          </a:custGeom>
+          <a:noFill/>
+          <a:ln>
+            <a:noFill/>
+          </a:ln>
+        </p:spPr>
+      </p:pic>
+      <p:pic>
+        <p:nvPicPr>
+          <p:cNvPr id="82" name="Google Shape;82;p17"/>
+          <p:cNvPicPr preferRelativeResize="0"/>
+          <p:nvPr/>
+        </p:nvPicPr>
+        <p:blipFill rotWithShape="1">
+          <a:blip r:embed="rId4">
+            <a:alphaModFix/>
+          </a:blip>
+          <a:srcRect b="16617" l="4466" r="0" t="21653"/>
+          <a:stretch/>
+        </p:blipFill>
+        <p:spPr>
+          <a:xfrm flipH="1" rot="2246355">
+            <a:off x="580139" y="10877"/>
+            <a:ext cx="2148739" cy="2777749"/>
+          </a:xfrm>
+          <a:custGeom>
+            <a:rect b="b" l="l" r="r" t="t"/>
+            <a:pathLst>
+              <a:path extrusionOk="0" h="3703665" w="2864985">
+                <a:moveTo>
+                  <a:pt x="2083861" y="0"/>
+                </a:moveTo>
+                <a:lnTo>
+                  <a:pt x="2864985" y="598063"/>
+                </a:lnTo>
+                <a:lnTo>
+                  <a:pt x="2864985" y="3612553"/>
+                </a:lnTo>
+                <a:lnTo>
+                  <a:pt x="2795226" y="3703665"/>
+                </a:lnTo>
+                <a:lnTo>
+                  <a:pt x="0" y="1563517"/>
+                </a:lnTo>
+                <a:close/>
+              </a:path>
+            </a:pathLst>
+          </a:custGeom>
+          <a:noFill/>
+          <a:ln>
+            <a:noFill/>
+          </a:ln>
+        </p:spPr>
+      </p:pic>
+      <p:sp>
+        <p:nvSpPr>
+          <p:cNvPr id="83" name="Google Shape;83;p17"/>
+          <p:cNvSpPr txBox="1"/>
+          <p:nvPr/>
+        </p:nvSpPr>
+        <p:spPr>
+          <a:xfrm>
+            <a:off x="3116431" y="2260111"/>
+            <a:ext cx="5231027" cy="1300326"/>
+          </a:xfrm>
+          <a:prstGeom prst="rect">
+            <a:avLst/>
+          </a:prstGeom>
+          <a:noFill/>
+          <a:ln>
+            <a:noFill/>
+          </a:ln>
+        </p:spPr>
+        <p:txBody>
+          <a:bodyPr anchorCtr="0" anchor="t" bIns="34275" lIns="0" spcFirstLastPara="1" rIns="68575" wrap="square" tIns="34275">
+            <a:spAutoFit/>
+          </a:bodyPr>
+          <a:lstStyle/>
+          <a:p>
+            <a:pPr indent="0" lvl="0" marL="0" marR="0" rtl="0" algn="r">
+              <a:lnSpc>
+                <a:spcPct val="100000"/>
+              </a:lnSpc>
+              <a:spcBef>
+                <a:spcPts val="0"/>
+              </a:spcBef>
+              <a:spcAft>
+                <a:spcPts val="0"/>
+              </a:spcAft>
+              <a:buClr>
+                <a:srgbClr val="000000"/>
+              </a:buClr>
+              <a:buSzPts val="4000"/>
+              <a:buFont typeface="Arial"/>
+              <a:buNone/>
+            </a:pPr>
+            <a:r>
+              <a:rPr b="1" i="0" lang="mn-MN" sz="4000" u="none" cap="none" strike="noStrike">
+                <a:solidFill>
+                  <a:srgbClr val="FADF4B"/>
+                </a:solidFill>
+                <a:latin typeface="Montserrat"/>
+                <a:ea typeface="Montserrat"/>
+                <a:cs typeface="Montserrat"/>
+                <a:sym typeface="Montserrat"/>
+              </a:rPr>
+              <a:t>UX үр дүн </a:t>
+            </a:r>
+            <a:r>
+              <a:rPr b="1" i="0" lang="mn-MN" sz="4000" u="none" cap="none" strike="noStrike">
+                <a:solidFill>
+                  <a:schemeClr val="lt1"/>
+                </a:solidFill>
+                <a:latin typeface="Montserrat"/>
+                <a:ea typeface="Montserrat"/>
+                <a:cs typeface="Montserrat"/>
+                <a:sym typeface="Montserrat"/>
+              </a:rPr>
+              <a:t>ба дүгнэлт</a:t>
+            </a:r>
+            <a:endParaRPr/>
+          </a:p>
+        </p:txBody>
+      </p:sp>
+      <p:sp>
+        <p:nvSpPr>
+          <p:cNvPr id="84" name="Google Shape;84;p17"/>
+          <p:cNvSpPr txBox="1"/>
+          <p:nvPr/>
+        </p:nvSpPr>
+        <p:spPr>
+          <a:xfrm>
+            <a:off x="5179127" y="3660518"/>
+            <a:ext cx="3168331" cy="615523"/>
+          </a:xfrm>
+          <a:prstGeom prst="rect">
+            <a:avLst/>
+          </a:prstGeom>
+          <a:noFill/>
+          <a:ln>
+            <a:noFill/>
+          </a:ln>
+        </p:spPr>
+        <p:txBody>
+          <a:bodyPr anchorCtr="0" anchor="t" bIns="34275" lIns="0" spcFirstLastPara="1" rIns="68575" wrap="square" tIns="34275">
+            <a:spAutoFit/>
+          </a:bodyPr>
+          <a:lstStyle/>
+          <a:p>
+            <a:pPr indent="0" lvl="0" marL="0" marR="0" rtl="0" algn="r">
+              <a:lnSpc>
+                <a:spcPct val="100000"/>
+              </a:lnSpc>
+              <a:spcBef>
+                <a:spcPts val="0"/>
+              </a:spcBef>
+              <a:spcAft>
+                <a:spcPts val="300"/>
+              </a:spcAft>
+              <a:buClr>
+                <a:srgbClr val="000000"/>
+              </a:buClr>
+              <a:buSzPts val="1100"/>
+              <a:buFont typeface="Arial"/>
+              <a:buNone/>
+            </a:pPr>
+            <a:r>
+              <a:rPr b="0" i="0" lang="mn-MN" sz="1100" u="none" cap="none" strike="noStrike">
+                <a:solidFill>
+                  <a:schemeClr val="lt1"/>
+                </a:solidFill>
+                <a:latin typeface="Arial"/>
+                <a:ea typeface="Arial"/>
+                <a:cs typeface="Arial"/>
+                <a:sym typeface="Arial"/>
+              </a:rPr>
+              <a:t>Дараагийн алхмуудаа тодорхой төлөвлөнө. Өсөлтийг тогтмол хэмжиж, сайжруулна.</a:t>
+            </a:r>
+            <a:endParaRPr b="0" i="0" sz="1100" u="none" cap="none" strike="noStrike">
+              <a:solidFill>
+                <a:schemeClr val="lt1"/>
+              </a:solidFill>
+              <a:latin typeface="Arial"/>
+              <a:ea typeface="Arial"/>
+              <a:cs typeface="Arial"/>
+              <a:sym typeface="Arial"/>
+            </a:endParaRPr>
+          </a:p>
+        </p:txBody>
+      </p:sp>
+      <p:pic>
+        <p:nvPicPr>
+          <p:cNvPr descr="24slides Karir &amp; Profil 2022 | Glints" id="85" name="Google Shape;85;p17"/>
+          <p:cNvPicPr preferRelativeResize="0"/>
+          <p:nvPr/>
+        </p:nvPicPr>
+        <p:blipFill rotWithShape="1">
+          <a:blip r:embed="rIdGc1">
+            <a:alphaModFix/>
+          </a:blip>
+          <a:stretch/>
+        </p:blipFill>
+        <p:spPr>
+          <a:xfrm>
+            <a:off x="250825" y="4454445"/>
+            <a:ext cx="1033125" cy="333725"/>
+          </a:xfrm>
+          <a:prstGeom prst="rect">
+            <a:avLst/>
+          </a:prstGeom>
+          <a:noFill/>
+          <a:ln>
+            <a:noFill/>
+          </a:ln>
+        </p:spPr>
+      </p:pic>
+      <p:grpSp>
+        <p:nvGrpSpPr>
+          <p:cNvPr id="86" name="Google Shape;86;p17"/>
+          <p:cNvGrpSpPr/>
+          <p:nvPr/>
+        </p:nvGrpSpPr>
+        <p:grpSpPr>
+          <a:xfrm flipH="1" rot="18900000">
+            <a:off x="4612148" y="3104676"/>
+            <a:ext cx="308529" cy="307776"/>
+            <a:chOff x="10439928" y="2985331"/>
+            <a:chExt cx="641137" cy="639573"/>
+          </a:xfrm>
+        </p:grpSpPr>
+        <p:sp>
+          <p:nvSpPr>
+            <p:cNvPr id="87" name="Google Shape;87;p17"/>
+            <p:cNvSpPr/>
+            <p:nvPr/>
+          </p:nvSpPr>
+          <p:spPr>
+            <a:xfrm>
+              <a:off x="10439928" y="2985331"/>
+              <a:ext cx="637800" cy="637800"/>
+            </a:xfrm>
+            <a:prstGeom prst="ellipse">
+              <a:avLst/>
+            </a:prstGeom>
+            <a:noFill/>
+            <a:ln cap="flat" cmpd="sng" w="9525">
+              <a:solidFill>
+                <a:schemeClr val="lt1">
+                  <a:alpha val="58431"/>
+                </a:schemeClr>
+              </a:solidFill>
+              <a:prstDash val="solid"/>
+              <a:miter lim="800000"/>
+              <a:headEnd len="sm" w="sm" type="none"/>
+              <a:tailEnd len="sm" w="sm" type="none"/>
+            </a:ln>
+          </p:spPr>
+          <p:txBody>
+            <a:bodyPr anchorCtr="0" anchor="ctr" bIns="25700" lIns="51425" spcFirstLastPara="1" rIns="51425" wrap="square" tIns="25700">
+              <a:noAutofit/>
+            </a:bodyPr>
+            <a:lstStyle/>
+            <a:p>
+              <a:pPr indent="0" lvl="0" marL="0" marR="0" rtl="0" algn="ctr">
+                <a:lnSpc>
+                  <a:spcPct val="100000"/>
+                </a:lnSpc>
+                <a:spcBef>
+                  <a:spcPts val="0"/>
+                </a:spcBef>
+                <a:spcAft>
+                  <a:spcPts val="0"/>
+                </a:spcAft>
+                <a:buClr>
+                  <a:schemeClr val="dk1"/>
+                </a:buClr>
+                <a:buSzPts val="1100"/>
+                <a:buFont typeface="Manrope"/>
+                <a:buNone/>
+              </a:pPr>
+              <a:r>
+                <a:t/>
+              </a:r>
+              <a:endParaRPr b="0" i="0" sz="1100" u="none" cap="none" strike="noStrike">
+                <a:solidFill>
+                  <a:schemeClr val="lt1"/>
+                </a:solidFill>
+                <a:latin typeface="Arial"/>
+                <a:ea typeface="Arial"/>
+                <a:cs typeface="Arial"/>
+                <a:sym typeface="Arial"/>
+              </a:endParaRPr>
+            </a:p>
+          </p:txBody>
+        </p:sp>
+        <p:grpSp>
+          <p:nvGrpSpPr>
+            <p:cNvPr id="88" name="Google Shape;88;p17"/>
+            <p:cNvGrpSpPr/>
+            <p:nvPr/>
+          </p:nvGrpSpPr>
+          <p:grpSpPr>
+            <a:xfrm rot="-2700000">
+              <a:off x="10645147" y="3223767"/>
+              <a:ext cx="227912" cy="160767"/>
+              <a:chOff x="3179128" y="1641228"/>
+              <a:chExt cx="1045800" cy="737700"/>
+            </a:xfrm>
+          </p:grpSpPr>
+          <p:sp>
+            <p:nvSpPr>
+              <p:cNvPr id="89" name="Google Shape;89;p17"/>
+              <p:cNvSpPr/>
+              <p:nvPr/>
+            </p:nvSpPr>
+            <p:spPr>
+              <a:xfrm>
+                <a:off x="3829228" y="1641228"/>
+                <a:ext cx="395700" cy="737700"/>
+              </a:xfrm>
+              <a:prstGeom prst="chevron">
+                <a:avLst>
+                  <a:gd fmla="val 100000" name="adj"/>
+                </a:avLst>
+              </a:prstGeom>
+              <a:solidFill>
+                <a:schemeClr val="accent1"/>
+              </a:solidFill>
+              <a:ln cap="flat" cmpd="sng" w="12700">
+                <a:solidFill>
+                  <a:srgbClr val="FADF4B"/>
+                </a:solidFill>
+                <a:prstDash val="solid"/>
+                <a:miter lim="800000"/>
+                <a:headEnd len="sm" w="sm" type="none"/>
+                <a:tailEnd len="sm" w="sm" type="none"/>
+              </a:ln>
+            </p:spPr>
+            <p:txBody>
+              <a:bodyPr anchorCtr="0" anchor="ctr" bIns="25700" lIns="51425" spcFirstLastPara="1" rIns="51425" wrap="square" tIns="25700">
+                <a:noAutofit/>
+              </a:bodyPr>
+              <a:lstStyle/>
+              <a:p>
+                <a:pPr indent="0" lvl="0" marL="0" marR="0" rtl="0" algn="ctr">
+                  <a:lnSpc>
+                    <a:spcPct val="100000"/>
+                  </a:lnSpc>
+                  <a:spcBef>
+                    <a:spcPts val="0"/>
+                  </a:spcBef>
+                  <a:spcAft>
+                    <a:spcPts val="0"/>
+                  </a:spcAft>
+                  <a:buClr>
+                    <a:schemeClr val="dk1"/>
+                  </a:buClr>
+                  <a:buSzPts val="1100"/>
+                  <a:buFont typeface="Manrope"/>
+                  <a:buNone/>
+                </a:pPr>
+                <a:r>
+                  <a:t/>
+                </a:r>
+                <a:endParaRPr b="0" i="0" sz="1100" u="none" cap="none" strike="noStrike">
+                  <a:solidFill>
+                    <a:schemeClr val="dk1"/>
+                  </a:solidFill>
+                  <a:latin typeface="Arial"/>
+                  <a:ea typeface="Arial"/>
+                  <a:cs typeface="Arial"/>
+                  <a:sym typeface="Arial"/>
+                </a:endParaRPr>
+              </a:p>
+            </p:txBody>
+          </p:sp>
+          <p:cxnSp>
+            <p:nvCxnSpPr>
+              <p:cNvPr id="90" name="Google Shape;90;p17"/>
+              <p:cNvCxnSpPr>
+                <a:stCxn id="89" idx="1"/>
+              </p:cNvCxnSpPr>
+              <p:nvPr/>
+            </p:nvCxnSpPr>
+            <p:spPr>
+              <a:xfrm flipH="1">
+                <a:off x="3179128" y="2010078"/>
+                <a:ext cx="1045800" cy="19800"/>
+              </a:xfrm>
+              <a:prstGeom prst="straightConnector1">
+                <a:avLst/>
+              </a:prstGeom>
+              <a:noFill/>
+              <a:ln cap="flat" cmpd="sng" w="12700">
+                <a:solidFill>
+                  <a:srgbClr val="FADF4B"/>
+                </a:solidFill>
+                <a:prstDash val="solid"/>
+                <a:miter lim="800000"/>
+                <a:headEnd len="sm" w="sm" type="none"/>
+                <a:tailEnd len="sm" w="sm" type="none"/>
+              </a:ln>
+            </p:spPr>
+          </p:cxnSp>
+        </p:grpSp>
+        <p:sp>
+          <p:nvSpPr>
+            <p:cNvPr id="91" name="Google Shape;91;p17"/>
+            <p:cNvSpPr/>
+            <p:nvPr/>
+          </p:nvSpPr>
+          <p:spPr>
+            <a:xfrm>
+              <a:off x="10443265" y="2987104"/>
+              <a:ext cx="637800" cy="637800"/>
+            </a:xfrm>
+            <a:prstGeom prst="arc">
+              <a:avLst>
+                <a:gd fmla="val 16200000" name="adj1"/>
+                <a:gd fmla="val 2547781" name="adj2"/>
+              </a:avLst>
+            </a:prstGeom>
+            <a:noFill/>
+            <a:ln cap="flat" cmpd="sng" w="19050">
+              <a:solidFill>
+                <a:srgbClr val="FADF4B"/>
+              </a:solidFill>
+              <a:prstDash val="solid"/>
+              <a:miter lim="800000"/>
+              <a:headEnd len="sm" w="sm" type="none"/>
+              <a:tailEnd len="sm" w="sm" type="none"/>
+            </a:ln>
+          </p:spPr>
+          <p:txBody>
+            <a:bodyPr anchorCtr="0" anchor="ctr" bIns="25700" lIns="51425" spcFirstLastPara="1" rIns="51425" wrap="square" tIns="25700">
+              <a:noAutofit/>
+            </a:bodyPr>
+            <a:lstStyle/>
+            <a:p>
+              <a:pPr indent="0" lvl="0" marL="0" marR="0" rtl="0" algn="ctr">
+                <a:lnSpc>
+                  <a:spcPct val="100000"/>
+                </a:lnSpc>
+                <a:spcBef>
+                  <a:spcPts val="0"/>
+                </a:spcBef>
+                <a:spcAft>
+                  <a:spcPts val="0"/>
+                </a:spcAft>
+                <a:buClr>
+                  <a:schemeClr val="dk1"/>
+                </a:buClr>
+                <a:buSzPts val="1100"/>
+                <a:buFont typeface="Manrope"/>
+                <a:buNone/>
+              </a:pPr>
+              <a:r>
+                <a:t/>
+              </a:r>
+              <a:endParaRPr b="0" i="0" sz="1100" u="none" cap="none" strike="noStrike">
+                <a:solidFill>
+                  <a:schemeClr val="dk1"/>
+                </a:solidFill>
+                <a:latin typeface="Arial"/>
+                <a:ea typeface="Arial"/>
+                <a:cs typeface="Arial"/>
+                <a:sym typeface="Arial"/>
+              </a:endParaRPr>
+            </a:p>
+          </p:txBody>
+        </p:sp>
+      </p:grpSp>
+    </p:spTree>
+  </p:cSld>
+  <p:clrMapOvr>
+    <a:masterClrMapping/>
+  </p:clrMapOvr>
+</p:sld>
+</file>
+
+<file path=ppt/slides/slide14.xml><?xml version="1.0" encoding="utf-8"?>
+<p:sld xmlns:a="http://schemas.openxmlformats.org/drawingml/2006/main" xmlns:r="http://schemas.openxmlformats.org/officeDocument/2006/relationships" xmlns:mc="http://schemas.openxmlformats.org/markup-compatibility/2006" xmlns:mv="urn:schemas-microsoft-com:mac:vml" xmlns:p="http://schemas.openxmlformats.org/presentationml/2006/main" xmlns:c="http://schemas.openxmlformats.org/drawingml/2006/chart" xmlns:dgm="http://schemas.openxmlformats.org/drawingml/2006/diagram" xmlns:o="urn:schemas-microsoft-com:office:office" xmlns:v="urn:schemas-microsoft-com:vml" xmlns:pvml="urn:schemas-microsoft-com:office:powerpoint" xmlns:com="http://schemas.openxmlformats.org/drawingml/2006/compatibility" xmlns:p14="http://schemas.microsoft.com/office/powerpoint/2010/main" xmlns:p15="http://schemas.microsoft.com/office/powerpoint/2012/main" xmlns:ahyp="http://schemas.microsoft.com/office/drawing/2018/hyperlinkcolor">
+  <p:cSld>
+    <p:spTree>
+      <p:nvGrpSpPr>
+        <p:cNvPr id="71" name="Shape 71"/>
+        <p:cNvGrpSpPr/>
+        <p:nvPr/>
+      </p:nvGrpSpPr>
+      <p:grpSpPr>
+        <a:xfrm>
+          <a:off x="0" y="0"/>
+          <a:ext cx="0" cy="0"/>
+          <a:chOff x="0" y="0"/>
+          <a:chExt cx="0" cy="0"/>
+        </a:xfrm>
+      </p:grpSpPr>
+      <p:sp>
+        <p:nvSpPr>
+          <p:cNvPr id="72" name="Google Shape;72;p17"/>
+          <p:cNvSpPr/>
+          <p:nvPr/>
+        </p:nvSpPr>
+        <p:spPr>
+          <a:xfrm flipH="1">
+            <a:off x="0" y="-3"/>
+            <a:ext cx="9144000" cy="5143497"/>
+          </a:xfrm>
+          <a:prstGeom prst="rect">
+            <a:avLst/>
+          </a:prstGeom>
+          <a:gradFill>
+            <a:gsLst>
+              <a:gs pos="0">
+                <a:srgbClr val="FADF4B"/>
+              </a:gs>
+              <a:gs pos="29000">
+                <a:srgbClr val="05121A"/>
+              </a:gs>
+              <a:gs pos="100000">
+                <a:srgbClr val="05121A"/>
+              </a:gs>
+            </a:gsLst>
+            <a:path path="circle">
+              <a:fillToRect b="0%" l="100%" r="0%" t="100%"/>
+            </a:path>
+            <a:tileRect b="-100%" l="0%" r="-100%" t="0%"/>
+          </a:gradFill>
+          <a:ln>
+            <a:noFill/>
+          </a:ln>
+        </p:spPr>
+        <p:txBody>
+          <a:bodyPr anchorCtr="0" anchor="ctr" bIns="34275" lIns="68575" spcFirstLastPara="1" rIns="68575" wrap="square" tIns="34275">
+            <a:noAutofit/>
+          </a:bodyPr>
+          <a:lstStyle/>
+          <a:p>
+            <a:pPr indent="0" lvl="0" marL="0" marR="0" rtl="0" algn="ctr">
+              <a:lnSpc>
+                <a:spcPct val="100000"/>
+              </a:lnSpc>
+              <a:spcBef>
+                <a:spcPts val="0"/>
+              </a:spcBef>
+              <a:spcAft>
+                <a:spcPts val="0"/>
+              </a:spcAft>
+              <a:buClr>
+                <a:srgbClr val="000000"/>
+              </a:buClr>
+              <a:buSzPts val="1400"/>
+              <a:buFont typeface="Arial"/>
+              <a:buNone/>
+            </a:pPr>
+            <a:r>
+              <a:t/>
+            </a:r>
+            <a:endParaRPr b="0" i="0" sz="1400" u="none" cap="none" strike="noStrike">
+              <a:solidFill>
+                <a:schemeClr val="lt1"/>
+              </a:solidFill>
+              <a:latin typeface="Manrope"/>
+              <a:ea typeface="Manrope"/>
+              <a:cs typeface="Manrope"/>
+              <a:sym typeface="Manrope"/>
+            </a:endParaRPr>
+          </a:p>
+        </p:txBody>
+      </p:sp>
+      <p:sp>
+        <p:nvSpPr>
+          <p:cNvPr id="73" name="Google Shape;73;p17"/>
+          <p:cNvSpPr/>
+          <p:nvPr/>
+        </p:nvSpPr>
+        <p:spPr>
+          <a:xfrm>
+            <a:off x="5267330" y="3038478"/>
+            <a:ext cx="3876676" cy="2105022"/>
+          </a:xfrm>
+          <a:prstGeom prst="rect">
+            <a:avLst/>
+          </a:prstGeom>
+          <a:gradFill>
+            <a:gsLst>
+              <a:gs pos="0">
+                <a:srgbClr val="FADF4B"/>
+              </a:gs>
+              <a:gs pos="26000">
+                <a:srgbClr val="05121A"/>
+              </a:gs>
+              <a:gs pos="100000">
+                <a:srgbClr val="05121A"/>
+              </a:gs>
+            </a:gsLst>
+            <a:path path="circle">
+              <a:fillToRect b="0%" l="100%" r="0%" t="100%"/>
+            </a:path>
+            <a:tileRect b="-100%" l="0%" r="-100%" t="0%"/>
+          </a:gradFill>
+          <a:ln>
+            <a:noFill/>
+          </a:ln>
+        </p:spPr>
+        <p:txBody>
+          <a:bodyPr anchorCtr="0" anchor="ctr" bIns="34275" lIns="68575" spcFirstLastPara="1" rIns="68575" wrap="square" tIns="34275">
+            <a:noAutofit/>
+          </a:bodyPr>
+          <a:lstStyle/>
+          <a:p>
+            <a:pPr indent="0" lvl="0" marL="0" marR="0" rtl="0" algn="ctr">
+              <a:lnSpc>
+                <a:spcPct val="100000"/>
+              </a:lnSpc>
+              <a:spcBef>
+                <a:spcPts val="0"/>
+              </a:spcBef>
+              <a:spcAft>
+                <a:spcPts val="0"/>
+              </a:spcAft>
+              <a:buClr>
+                <a:srgbClr val="000000"/>
+              </a:buClr>
+              <a:buSzPts val="1400"/>
+              <a:buFont typeface="Arial"/>
+              <a:buNone/>
+            </a:pPr>
+            <a:r>
+              <a:t/>
+            </a:r>
+            <a:endParaRPr b="0" i="0" sz="1400" u="none" cap="none" strike="noStrike">
+              <a:solidFill>
+                <a:schemeClr val="lt1"/>
+              </a:solidFill>
+              <a:latin typeface="Manrope"/>
+              <a:ea typeface="Manrope"/>
+              <a:cs typeface="Manrope"/>
+              <a:sym typeface="Manrope"/>
+            </a:endParaRPr>
+          </a:p>
+        </p:txBody>
+      </p:sp>
+      <p:sp>
+        <p:nvSpPr>
+          <p:cNvPr id="74" name="Google Shape;74;p17"/>
+          <p:cNvSpPr/>
+          <p:nvPr/>
+        </p:nvSpPr>
+        <p:spPr>
+          <a:xfrm rot="5400000">
+            <a:off x="379570" y="-392802"/>
+            <a:ext cx="1881188" cy="2640332"/>
+          </a:xfrm>
+          <a:prstGeom prst="flowChartManualInput">
+            <a:avLst/>
+          </a:prstGeom>
+          <a:gradFill>
+            <a:gsLst>
+              <a:gs pos="0">
+                <a:schemeClr val="accent3"/>
+              </a:gs>
+              <a:gs pos="38000">
+                <a:srgbClr val="FADF4B"/>
+              </a:gs>
+              <a:gs pos="67000">
+                <a:srgbClr val="2B3A42"/>
+              </a:gs>
+              <a:gs pos="100000">
+                <a:srgbClr val="05121A"/>
+              </a:gs>
+            </a:gsLst>
+            <a:path path="circle">
+              <a:fillToRect b="100%" l="100%" r="0%" t="0%"/>
+            </a:path>
+            <a:tileRect b="0%" l="0%" r="-100%" t="-100%"/>
+          </a:gradFill>
+          <a:ln>
+            <a:noFill/>
+          </a:ln>
+        </p:spPr>
+        <p:txBody>
+          <a:bodyPr anchorCtr="0" anchor="ctr" bIns="34275" lIns="68575" spcFirstLastPara="1" rIns="68575" wrap="square" tIns="34275">
+            <a:noAutofit/>
+          </a:bodyPr>
+          <a:lstStyle/>
+          <a:p>
+            <a:pPr indent="0" lvl="0" marL="0" marR="0" rtl="0" algn="ctr">
+              <a:lnSpc>
+                <a:spcPct val="100000"/>
+              </a:lnSpc>
+              <a:spcBef>
+                <a:spcPts val="0"/>
+              </a:spcBef>
+              <a:spcAft>
+                <a:spcPts val="0"/>
+              </a:spcAft>
+              <a:buClr>
+                <a:srgbClr val="000000"/>
+              </a:buClr>
+              <a:buSzPts val="1400"/>
+              <a:buFont typeface="Arial"/>
+              <a:buNone/>
+            </a:pPr>
+            <a:r>
+              <a:t/>
+            </a:r>
+            <a:endParaRPr b="0" i="0" sz="1400" u="none" cap="none" strike="noStrike">
+              <a:solidFill>
+                <a:schemeClr val="lt1"/>
+              </a:solidFill>
+              <a:latin typeface="Manrope"/>
+              <a:ea typeface="Manrope"/>
+              <a:cs typeface="Manrope"/>
+              <a:sym typeface="Manrope"/>
+            </a:endParaRPr>
+          </a:p>
+        </p:txBody>
+      </p:sp>
+      <p:sp>
+        <p:nvSpPr>
+          <p:cNvPr id="75" name="Google Shape;75;p17"/>
+          <p:cNvSpPr/>
+          <p:nvPr/>
+        </p:nvSpPr>
+        <p:spPr>
+          <a:xfrm flipH="1">
+            <a:off x="1959429" y="0"/>
+            <a:ext cx="7184574" cy="5143497"/>
+          </a:xfrm>
+          <a:custGeom>
+            <a:rect b="b" l="l" r="r" t="t"/>
+            <a:pathLst>
+              <a:path extrusionOk="0" h="6857996" w="9579432">
+                <a:moveTo>
+                  <a:pt x="0" y="0"/>
+                </a:moveTo>
+                <a:lnTo>
+                  <a:pt x="9579432" y="0"/>
+                </a:lnTo>
+                <a:lnTo>
+                  <a:pt x="9579431" y="4"/>
+                </a:lnTo>
+                <a:lnTo>
+                  <a:pt x="3913990" y="4"/>
+                </a:lnTo>
+                <a:lnTo>
+                  <a:pt x="4570139" y="1768319"/>
+                </a:lnTo>
+                <a:cubicBezTo>
+                  <a:pt x="4570139" y="1768319"/>
+                  <a:pt x="4938048" y="2505077"/>
+                  <a:pt x="5705107" y="2505077"/>
+                </a:cubicBezTo>
+                <a:lnTo>
+                  <a:pt x="8676383" y="2505077"/>
+                </a:lnTo>
+                <a:lnTo>
+                  <a:pt x="7107210" y="6857996"/>
+                </a:lnTo>
+                <a:lnTo>
+                  <a:pt x="1136912" y="6857996"/>
+                </a:lnTo>
+                <a:lnTo>
+                  <a:pt x="0" y="3704178"/>
+                </a:lnTo>
+                <a:lnTo>
+                  <a:pt x="0" y="0"/>
+                </a:lnTo>
+                <a:close/>
+              </a:path>
+            </a:pathLst>
+          </a:custGeom>
+          <a:gradFill>
+            <a:gsLst>
+              <a:gs pos="0">
+                <a:schemeClr val="accent3"/>
+              </a:gs>
+              <a:gs pos="44000">
+                <a:srgbClr val="FADF4B"/>
+              </a:gs>
+              <a:gs pos="67000">
+                <a:srgbClr val="2B3A42"/>
+              </a:gs>
+              <a:gs pos="100000">
+                <a:srgbClr val="05121A"/>
+              </a:gs>
+            </a:gsLst>
+            <a:path path="circle">
+              <a:fillToRect b="100%" l="100%" r="0%" t="0%"/>
+            </a:path>
+            <a:tileRect b="0%" l="0%" r="-100%" t="-100%"/>
+          </a:gradFill>
+          <a:ln>
+            <a:noFill/>
+          </a:ln>
+        </p:spPr>
+        <p:txBody>
+          <a:bodyPr anchorCtr="0" anchor="ctr" bIns="34275" lIns="68575" spcFirstLastPara="1" rIns="68575" wrap="square" tIns="34275">
+            <a:noAutofit/>
+          </a:bodyPr>
+          <a:lstStyle/>
+          <a:p>
+            <a:pPr indent="0" lvl="0" marL="0" marR="0" rtl="0" algn="ctr">
+              <a:lnSpc>
+                <a:spcPct val="100000"/>
+              </a:lnSpc>
+              <a:spcBef>
+                <a:spcPts val="0"/>
+              </a:spcBef>
+              <a:spcAft>
+                <a:spcPts val="0"/>
+              </a:spcAft>
+              <a:buClr>
+                <a:srgbClr val="000000"/>
+              </a:buClr>
+              <a:buSzPts val="1400"/>
+              <a:buFont typeface="Arial"/>
+              <a:buNone/>
+            </a:pPr>
+            <a:r>
+              <a:t/>
+            </a:r>
+            <a:endParaRPr b="0" i="0" sz="1400" u="none" cap="none" strike="noStrike">
+              <a:solidFill>
+                <a:schemeClr val="lt1"/>
+              </a:solidFill>
+              <a:latin typeface="Manrope"/>
+              <a:ea typeface="Manrope"/>
+              <a:cs typeface="Manrope"/>
+              <a:sym typeface="Manrope"/>
+            </a:endParaRPr>
+          </a:p>
+        </p:txBody>
+      </p:sp>
+      <p:sp>
+        <p:nvSpPr>
+          <p:cNvPr id="76" name="Google Shape;76;p17"/>
+          <p:cNvSpPr/>
+          <p:nvPr/>
+        </p:nvSpPr>
+        <p:spPr>
+          <a:xfrm flipH="1">
+            <a:off x="1937998" y="0"/>
+            <a:ext cx="7184574" cy="5143497"/>
+          </a:xfrm>
+          <a:custGeom>
+            <a:rect b="b" l="l" r="r" t="t"/>
+            <a:pathLst>
+              <a:path extrusionOk="0" h="6857996" w="9579432">
+                <a:moveTo>
+                  <a:pt x="0" y="0"/>
+                </a:moveTo>
+                <a:lnTo>
+                  <a:pt x="9579432" y="0"/>
+                </a:lnTo>
+                <a:lnTo>
+                  <a:pt x="9579431" y="4"/>
+                </a:lnTo>
+                <a:lnTo>
+                  <a:pt x="3913990" y="4"/>
+                </a:lnTo>
+                <a:lnTo>
+                  <a:pt x="4570139" y="1768319"/>
+                </a:lnTo>
+                <a:cubicBezTo>
+                  <a:pt x="4570139" y="1768319"/>
+                  <a:pt x="4938048" y="2505077"/>
+                  <a:pt x="5705107" y="2505077"/>
+                </a:cubicBezTo>
+                <a:lnTo>
+                  <a:pt x="8676383" y="2505077"/>
+                </a:lnTo>
+                <a:lnTo>
+                  <a:pt x="7107210" y="6857996"/>
+                </a:lnTo>
+                <a:lnTo>
+                  <a:pt x="1136912" y="6857996"/>
+                </a:lnTo>
+                <a:lnTo>
+                  <a:pt x="0" y="3704178"/>
+                </a:lnTo>
+                <a:lnTo>
+                  <a:pt x="0" y="0"/>
+                </a:lnTo>
+                <a:close/>
+              </a:path>
+            </a:pathLst>
+          </a:custGeom>
+          <a:gradFill>
+            <a:gsLst>
+              <a:gs pos="0">
+                <a:srgbClr val="05121A"/>
+              </a:gs>
+              <a:gs pos="43000">
+                <a:srgbClr val="2B3A42"/>
+              </a:gs>
+              <a:gs pos="67000">
+                <a:srgbClr val="2B3A42"/>
+              </a:gs>
+              <a:gs pos="100000">
+                <a:srgbClr val="05121A">
+                  <a:alpha val="0"/>
+                </a:srgbClr>
+              </a:gs>
+            </a:gsLst>
+            <a:path path="circle">
+              <a:fillToRect b="100%" l="0%" r="100%" t="0%"/>
+            </a:path>
+            <a:tileRect b="0%" l="-100%" r="0%" t="-100%"/>
+          </a:gradFill>
+          <a:ln>
+            <a:noFill/>
+          </a:ln>
+        </p:spPr>
+        <p:txBody>
+          <a:bodyPr anchorCtr="0" anchor="ctr" bIns="34275" lIns="68575" spcFirstLastPara="1" rIns="68575" wrap="square" tIns="34275">
+            <a:noAutofit/>
+          </a:bodyPr>
+          <a:lstStyle/>
+          <a:p>
+            <a:pPr indent="0" lvl="0" marL="0" marR="0" rtl="0" algn="ctr">
+              <a:lnSpc>
+                <a:spcPct val="100000"/>
+              </a:lnSpc>
+              <a:spcBef>
+                <a:spcPts val="0"/>
+              </a:spcBef>
+              <a:spcAft>
+                <a:spcPts val="0"/>
+              </a:spcAft>
+              <a:buClr>
+                <a:srgbClr val="000000"/>
+              </a:buClr>
+              <a:buSzPts val="1400"/>
+              <a:buFont typeface="Arial"/>
+              <a:buNone/>
+            </a:pPr>
+            <a:r>
+              <a:t/>
+            </a:r>
+            <a:endParaRPr b="0" i="0" sz="1400" u="none" cap="none" strike="noStrike">
+              <a:solidFill>
+                <a:schemeClr val="lt1"/>
+              </a:solidFill>
+              <a:latin typeface="Manrope"/>
+              <a:ea typeface="Manrope"/>
+              <a:cs typeface="Manrope"/>
+              <a:sym typeface="Manrope"/>
+            </a:endParaRPr>
+          </a:p>
+        </p:txBody>
+      </p:sp>
+      <p:grpSp>
+        <p:nvGrpSpPr>
+          <p:cNvPr id="77" name="Google Shape;77;p17"/>
+          <p:cNvGrpSpPr/>
+          <p:nvPr/>
+        </p:nvGrpSpPr>
+        <p:grpSpPr>
+          <a:xfrm flipH="1">
+            <a:off x="487260" y="-147"/>
+            <a:ext cx="3944541" cy="3257841"/>
+            <a:chOff x="4712199" y="-350860"/>
+            <a:chExt cx="3944541" cy="3257841"/>
+          </a:xfrm>
+        </p:grpSpPr>
+        <p:cxnSp>
+          <p:nvCxnSpPr>
+            <p:cNvPr id="78" name="Google Shape;78;p17"/>
+            <p:cNvCxnSpPr>
+              <a:endCxn id="79" idx="2"/>
+            </p:cNvCxnSpPr>
+            <p:nvPr/>
+          </p:nvCxnSpPr>
+          <p:spPr>
+            <a:xfrm>
+              <a:off x="4712199" y="2906980"/>
+              <a:ext cx="3733800" cy="0"/>
+            </a:xfrm>
+            <a:prstGeom prst="straightConnector1">
+              <a:avLst/>
+            </a:prstGeom>
+            <a:noFill/>
+            <a:ln cap="flat" cmpd="sng" w="12700">
+              <a:solidFill>
+                <a:schemeClr val="lt1">
+                  <a:alpha val="32941"/>
+                </a:schemeClr>
+              </a:solidFill>
+              <a:prstDash val="solid"/>
+              <a:miter lim="800000"/>
+              <a:headEnd len="sm" w="sm" type="none"/>
+              <a:tailEnd len="sm" w="sm" type="none"/>
+            </a:ln>
+          </p:spPr>
+        </p:cxnSp>
+        <p:cxnSp>
+          <p:nvCxnSpPr>
+            <p:cNvPr id="80" name="Google Shape;80;p17"/>
+            <p:cNvCxnSpPr>
+              <a:endCxn id="79" idx="0"/>
+            </p:cNvCxnSpPr>
+            <p:nvPr/>
+          </p:nvCxnSpPr>
+          <p:spPr>
+            <a:xfrm>
+              <a:off x="8656739" y="-350860"/>
+              <a:ext cx="0" cy="3047100"/>
+            </a:xfrm>
+            <a:prstGeom prst="straightConnector1">
+              <a:avLst/>
+            </a:prstGeom>
+            <a:noFill/>
+            <a:ln cap="flat" cmpd="sng" w="12700">
+              <a:solidFill>
+                <a:srgbClr val="EDF1FF">
+                  <a:alpha val="32941"/>
+                </a:srgbClr>
+              </a:solidFill>
+              <a:prstDash val="solid"/>
+              <a:miter lim="800000"/>
+              <a:headEnd len="sm" w="sm" type="none"/>
+              <a:tailEnd len="sm" w="sm" type="none"/>
+            </a:ln>
+          </p:spPr>
+        </p:cxnSp>
+        <p:sp>
+          <p:nvSpPr>
+            <p:cNvPr id="79" name="Google Shape;79;p17"/>
+            <p:cNvSpPr/>
+            <p:nvPr/>
+          </p:nvSpPr>
+          <p:spPr>
+            <a:xfrm rot="5400000">
+              <a:off x="8235258" y="2485499"/>
+              <a:ext cx="421481" cy="421481"/>
+            </a:xfrm>
+            <a:prstGeom prst="arc">
+              <a:avLst>
+                <a:gd fmla="val 16200000" name="adj1"/>
+                <a:gd fmla="val 0" name="adj2"/>
+              </a:avLst>
+            </a:prstGeom>
+            <a:noFill/>
+            <a:ln cap="flat" cmpd="sng" w="12700">
+              <a:solidFill>
+                <a:schemeClr val="lt1">
+                  <a:alpha val="32941"/>
+                </a:schemeClr>
+              </a:solidFill>
+              <a:prstDash val="solid"/>
+              <a:miter lim="800000"/>
+              <a:headEnd len="sm" w="sm" type="none"/>
+              <a:tailEnd len="sm" w="sm" type="none"/>
+            </a:ln>
+          </p:spPr>
+          <p:txBody>
+            <a:bodyPr anchorCtr="0" anchor="ctr" bIns="34275" lIns="68575" spcFirstLastPara="1" rIns="68575" wrap="square" tIns="34275">
+              <a:noAutofit/>
+            </a:bodyPr>
+            <a:lstStyle/>
+            <a:p>
+              <a:pPr indent="0" lvl="0" marL="0" marR="0" rtl="0" algn="ctr">
+                <a:lnSpc>
+                  <a:spcPct val="100000"/>
+                </a:lnSpc>
+                <a:spcBef>
+                  <a:spcPts val="0"/>
+                </a:spcBef>
+                <a:spcAft>
+                  <a:spcPts val="0"/>
+                </a:spcAft>
+                <a:buClr>
+                  <a:srgbClr val="000000"/>
+                </a:buClr>
+                <a:buSzPts val="1400"/>
+                <a:buFont typeface="Arial"/>
+                <a:buNone/>
+              </a:pPr>
+              <a:r>
+                <a:t/>
+              </a:r>
+              <a:endParaRPr b="0" i="0" sz="1400" u="none" cap="none" strike="noStrike">
+                <a:solidFill>
+                  <a:schemeClr val="dk1"/>
+                </a:solidFill>
+                <a:latin typeface="Manrope"/>
+                <a:ea typeface="Manrope"/>
+                <a:cs typeface="Manrope"/>
+                <a:sym typeface="Manrope"/>
+              </a:endParaRPr>
+            </a:p>
+          </p:txBody>
+        </p:sp>
+      </p:grpSp>
+      <p:pic>
+        <p:nvPicPr>
+          <p:cNvPr id="81" name="Google Shape;81;p17"/>
+          <p:cNvPicPr preferRelativeResize="0"/>
+          <p:nvPr/>
+        </p:nvPicPr>
+        <p:blipFill rotWithShape="1">
+          <a:blip r:embed="rId3">
+            <a:alphaModFix/>
+          </a:blip>
+          <a:srcRect b="11716" l="0" r="0" t="15703"/>
+          <a:stretch/>
+        </p:blipFill>
+        <p:spPr>
+          <a:xfrm flipH="1" rot="13563727">
+            <a:off x="2630042" y="-1604313"/>
+            <a:ext cx="4403381" cy="6394153"/>
+          </a:xfrm>
+          <a:custGeom>
+            <a:rect b="b" l="l" r="r" t="t"/>
+            <a:pathLst>
+              <a:path extrusionOk="0" h="8525537" w="5871174">
+                <a:moveTo>
+                  <a:pt x="4093990" y="8525537"/>
+                </a:moveTo>
+                <a:lnTo>
+                  <a:pt x="0" y="4276878"/>
+                </a:lnTo>
+                <a:lnTo>
+                  <a:pt x="0" y="4276873"/>
+                </a:lnTo>
+                <a:lnTo>
+                  <a:pt x="2679906" y="7058024"/>
+                </a:lnTo>
+                <a:lnTo>
+                  <a:pt x="3497969" y="5358541"/>
+                </a:lnTo>
+                <a:cubicBezTo>
+                  <a:pt x="3497969" y="5358541"/>
+                  <a:pt x="3773219" y="4582393"/>
+                  <a:pt x="3240973" y="4030039"/>
+                </a:cubicBezTo>
+                <a:lnTo>
+                  <a:pt x="1179270" y="1890446"/>
+                </a:lnTo>
+                <a:lnTo>
+                  <a:pt x="5402589" y="0"/>
+                </a:lnTo>
+                <a:lnTo>
+                  <a:pt x="5871174" y="486288"/>
+                </a:lnTo>
+                <a:lnTo>
+                  <a:pt x="5871174" y="8525537"/>
+                </a:lnTo>
+                <a:close/>
+              </a:path>
+            </a:pathLst>
+          </a:custGeom>
+          <a:noFill/>
+          <a:ln>
+            <a:noFill/>
+          </a:ln>
+        </p:spPr>
+      </p:pic>
+      <p:pic>
+        <p:nvPicPr>
+          <p:cNvPr id="82" name="Google Shape;82;p17"/>
+          <p:cNvPicPr preferRelativeResize="0"/>
+          <p:nvPr/>
+        </p:nvPicPr>
+        <p:blipFill rotWithShape="1">
+          <a:blip r:embed="rId4">
+            <a:alphaModFix/>
+          </a:blip>
+          <a:srcRect b="16617" l="4466" r="0" t="21653"/>
+          <a:stretch/>
+        </p:blipFill>
+        <p:spPr>
+          <a:xfrm flipH="1" rot="2246355">
+            <a:off x="580139" y="10877"/>
+            <a:ext cx="2148739" cy="2777749"/>
+          </a:xfrm>
+          <a:custGeom>
+            <a:rect b="b" l="l" r="r" t="t"/>
+            <a:pathLst>
+              <a:path extrusionOk="0" h="3703665" w="2864985">
+                <a:moveTo>
+                  <a:pt x="2083861" y="0"/>
+                </a:moveTo>
+                <a:lnTo>
+                  <a:pt x="2864985" y="598063"/>
+                </a:lnTo>
+                <a:lnTo>
+                  <a:pt x="2864985" y="3612553"/>
+                </a:lnTo>
+                <a:lnTo>
+                  <a:pt x="2795226" y="3703665"/>
+                </a:lnTo>
+                <a:lnTo>
+                  <a:pt x="0" y="1563517"/>
+                </a:lnTo>
+                <a:close/>
+              </a:path>
+            </a:pathLst>
+          </a:custGeom>
+          <a:noFill/>
+          <a:ln>
+            <a:noFill/>
+          </a:ln>
+        </p:spPr>
+      </p:pic>
+      <p:sp>
+        <p:nvSpPr>
+          <p:cNvPr id="83" name="Google Shape;83;p17"/>
+          <p:cNvSpPr txBox="1"/>
+          <p:nvPr/>
+        </p:nvSpPr>
+        <p:spPr>
+          <a:xfrm>
+            <a:off x="3116431" y="2260111"/>
+            <a:ext cx="5231027" cy="1300326"/>
+          </a:xfrm>
+          <a:prstGeom prst="rect">
+            <a:avLst/>
+          </a:prstGeom>
+          <a:noFill/>
+          <a:ln>
+            <a:noFill/>
+          </a:ln>
+        </p:spPr>
+        <p:txBody>
+          <a:bodyPr anchorCtr="0" anchor="t" bIns="34275" lIns="0" spcFirstLastPara="1" rIns="68575" wrap="square" tIns="34275">
+            <a:spAutoFit/>
+          </a:bodyPr>
+          <a:lstStyle/>
+          <a:p>
+            <a:pPr indent="0" lvl="0" marL="0" marR="0" rtl="0" algn="r">
+              <a:lnSpc>
+                <a:spcPct val="100000"/>
+              </a:lnSpc>
+              <a:spcBef>
+                <a:spcPts val="0"/>
+              </a:spcBef>
+              <a:spcAft>
+                <a:spcPts val="0"/>
+              </a:spcAft>
+              <a:buClr>
+                <a:srgbClr val="000000"/>
+              </a:buClr>
+              <a:buSzPts val="4000"/>
+              <a:buFont typeface="Arial"/>
+              <a:buNone/>
+            </a:pPr>
+            <a:r>
+              <a:rPr b="1" i="0" lang="mn-MN" sz="4000" u="none" cap="none" strike="noStrike">
+                <a:solidFill>
+                  <a:schemeClr val="lt1"/>
+                </a:solidFill>
+                <a:latin typeface="Montserrat"/>
+                <a:ea typeface="Montserrat"/>
+                <a:cs typeface="Montserrat"/>
+                <a:sym typeface="Montserrat"/>
+              </a:rPr>
+              <a:t>Баярлалаа!</a:t>
+            </a:r>
+            <a:endParaRPr/>
+          </a:p>
+        </p:txBody>
+      </p:sp>
+      <p:sp>
+        <p:nvSpPr>
+          <p:cNvPr id="84" name="Google Shape;84;p17"/>
+          <p:cNvSpPr txBox="1"/>
+          <p:nvPr/>
+        </p:nvSpPr>
+        <p:spPr>
+          <a:xfrm>
+            <a:off x="5179127" y="3660518"/>
+            <a:ext cx="3168331" cy="615523"/>
+          </a:xfrm>
+          <a:prstGeom prst="rect">
+            <a:avLst/>
+          </a:prstGeom>
+          <a:noFill/>
+          <a:ln>
+            <a:noFill/>
+          </a:ln>
+        </p:spPr>
+        <p:txBody>
+          <a:bodyPr anchorCtr="0" anchor="t" bIns="34275" lIns="0" spcFirstLastPara="1" rIns="68575" wrap="square" tIns="34275">
+            <a:spAutoFit/>
+          </a:bodyPr>
+          <a:lstStyle/>
+          <a:p>
+            <a:pPr indent="0" lvl="0" marL="0" marR="0" rtl="0" algn="r">
+              <a:lnSpc>
+                <a:spcPct val="100000"/>
+              </a:lnSpc>
+              <a:spcBef>
+                <a:spcPts val="0"/>
+              </a:spcBef>
+              <a:spcAft>
+                <a:spcPts val="300"/>
+              </a:spcAft>
+              <a:buClr>
+                <a:srgbClr val="000000"/>
+              </a:buClr>
+              <a:buSzPts val="1100"/>
+              <a:buFont typeface="Arial"/>
+              <a:buNone/>
+            </a:pPr>
+            <a:r>
+              <a:rPr b="0" i="0" lang="mn-MN" sz="1100" u="none" cap="none" strike="noStrike">
+                <a:solidFill>
+                  <a:schemeClr val="lt1"/>
+                </a:solidFill>
+                <a:latin typeface="Arial"/>
+                <a:ea typeface="Arial"/>
+                <a:cs typeface="Arial"/>
+                <a:sym typeface="Arial"/>
+              </a:rPr>
+              <a:t>Энэ хэсэгт өөрийн текстээ оруулна уу. Гол үзүүлэлтүүдээ товч дурдана.</a:t>
+            </a:r>
+            <a:endParaRPr b="0" i="0" sz="1100" u="none" cap="none" strike="noStrike">
+              <a:solidFill>
+                <a:schemeClr val="lt1"/>
+              </a:solidFill>
+              <a:latin typeface="Arial"/>
+              <a:ea typeface="Arial"/>
+              <a:cs typeface="Arial"/>
+              <a:sym typeface="Arial"/>
+            </a:endParaRPr>
+          </a:p>
+        </p:txBody>
+      </p:sp>
+      <p:pic>
+        <p:nvPicPr>
+          <p:cNvPr descr="24slides Karir &amp; Profil 2022 | Glints" id="85" name="Google Shape;85;p17"/>
+          <p:cNvPicPr preferRelativeResize="0"/>
+          <p:nvPr/>
+        </p:nvPicPr>
+        <p:blipFill rotWithShape="1">
+          <a:blip r:embed="rIdGc1">
+            <a:alphaModFix/>
+          </a:blip>
+          <a:stretch/>
+        </p:blipFill>
+        <p:spPr>
+          <a:xfrm>
+            <a:off x="250825" y="4454445"/>
+            <a:ext cx="1033125" cy="333725"/>
+          </a:xfrm>
+          <a:prstGeom prst="rect">
+            <a:avLst/>
+          </a:prstGeom>
+          <a:noFill/>
+          <a:ln>
+            <a:noFill/>
+          </a:ln>
+        </p:spPr>
+      </p:pic>
+      <p:grpSp>
+        <p:nvGrpSpPr>
+          <p:cNvPr id="86" name="Google Shape;86;p17"/>
+          <p:cNvGrpSpPr/>
+          <p:nvPr/>
+        </p:nvGrpSpPr>
+        <p:grpSpPr>
+          <a:xfrm flipH="1" rot="18900000">
+            <a:off x="4612148" y="3104676"/>
+            <a:ext cx="308529" cy="307776"/>
+            <a:chOff x="10439928" y="2985331"/>
+            <a:chExt cx="641137" cy="639573"/>
+          </a:xfrm>
+        </p:grpSpPr>
+        <p:sp>
+          <p:nvSpPr>
+            <p:cNvPr id="87" name="Google Shape;87;p17"/>
+            <p:cNvSpPr/>
+            <p:nvPr/>
+          </p:nvSpPr>
+          <p:spPr>
+            <a:xfrm>
+              <a:off x="10439928" y="2985331"/>
+              <a:ext cx="637800" cy="637800"/>
+            </a:xfrm>
+            <a:prstGeom prst="ellipse">
+              <a:avLst/>
+            </a:prstGeom>
+            <a:noFill/>
+            <a:ln cap="flat" cmpd="sng" w="9525">
+              <a:solidFill>
+                <a:schemeClr val="lt1">
+                  <a:alpha val="58431"/>
+                </a:schemeClr>
+              </a:solidFill>
+              <a:prstDash val="solid"/>
+              <a:miter lim="800000"/>
+              <a:headEnd len="sm" w="sm" type="none"/>
+              <a:tailEnd len="sm" w="sm" type="none"/>
+            </a:ln>
+          </p:spPr>
+          <p:txBody>
+            <a:bodyPr anchorCtr="0" anchor="ctr" bIns="25700" lIns="51425" spcFirstLastPara="1" rIns="51425" wrap="square" tIns="25700">
+              <a:noAutofit/>
+            </a:bodyPr>
+            <a:lstStyle/>
+            <a:p>
+              <a:pPr indent="0" lvl="0" marL="0" marR="0" rtl="0" algn="ctr">
+                <a:lnSpc>
+                  <a:spcPct val="100000"/>
+                </a:lnSpc>
+                <a:spcBef>
+                  <a:spcPts val="0"/>
+                </a:spcBef>
+                <a:spcAft>
+                  <a:spcPts val="0"/>
+                </a:spcAft>
+                <a:buClr>
+                  <a:schemeClr val="dk1"/>
+                </a:buClr>
+                <a:buSzPts val="1100"/>
+                <a:buFont typeface="Manrope"/>
+                <a:buNone/>
+              </a:pPr>
+              <a:r>
+                <a:t/>
+              </a:r>
+              <a:endParaRPr b="0" i="0" sz="1100" u="none" cap="none" strike="noStrike">
+                <a:solidFill>
+                  <a:schemeClr val="lt1"/>
+                </a:solidFill>
+                <a:latin typeface="Arial"/>
+                <a:ea typeface="Arial"/>
+                <a:cs typeface="Arial"/>
+                <a:sym typeface="Arial"/>
+              </a:endParaRPr>
+            </a:p>
+          </p:txBody>
+        </p:sp>
+        <p:grpSp>
+          <p:nvGrpSpPr>
+            <p:cNvPr id="88" name="Google Shape;88;p17"/>
+            <p:cNvGrpSpPr/>
+            <p:nvPr/>
+          </p:nvGrpSpPr>
+          <p:grpSpPr>
+            <a:xfrm rot="-2700000">
+              <a:off x="10645147" y="3223767"/>
+              <a:ext cx="227912" cy="160767"/>
+              <a:chOff x="3179128" y="1641228"/>
+              <a:chExt cx="1045800" cy="737700"/>
+            </a:xfrm>
+          </p:grpSpPr>
+          <p:sp>
+            <p:nvSpPr>
+              <p:cNvPr id="89" name="Google Shape;89;p17"/>
+              <p:cNvSpPr/>
+              <p:nvPr/>
+            </p:nvSpPr>
+            <p:spPr>
+              <a:xfrm>
+                <a:off x="3829228" y="1641228"/>
+                <a:ext cx="395700" cy="737700"/>
+              </a:xfrm>
+              <a:prstGeom prst="chevron">
+                <a:avLst>
+                  <a:gd fmla="val 100000" name="adj"/>
+                </a:avLst>
+              </a:prstGeom>
+              <a:solidFill>
+                <a:schemeClr val="accent1"/>
+              </a:solidFill>
+              <a:ln cap="flat" cmpd="sng" w="12700">
+                <a:solidFill>
+                  <a:srgbClr val="FADF4B"/>
+                </a:solidFill>
+                <a:prstDash val="solid"/>
+                <a:miter lim="800000"/>
+                <a:headEnd len="sm" w="sm" type="none"/>
+                <a:tailEnd len="sm" w="sm" type="none"/>
+              </a:ln>
+            </p:spPr>
+            <p:txBody>
+              <a:bodyPr anchorCtr="0" anchor="ctr" bIns="25700" lIns="51425" spcFirstLastPara="1" rIns="51425" wrap="square" tIns="25700">
+                <a:noAutofit/>
+              </a:bodyPr>
+              <a:lstStyle/>
+              <a:p>
+                <a:pPr indent="0" lvl="0" marL="0" marR="0" rtl="0" algn="ctr">
+                  <a:lnSpc>
+                    <a:spcPct val="100000"/>
+                  </a:lnSpc>
+                  <a:spcBef>
+                    <a:spcPts val="0"/>
+                  </a:spcBef>
+                  <a:spcAft>
+                    <a:spcPts val="0"/>
+                  </a:spcAft>
+                  <a:buClr>
+                    <a:schemeClr val="dk1"/>
+                  </a:buClr>
+                  <a:buSzPts val="1100"/>
+                  <a:buFont typeface="Manrope"/>
+                  <a:buNone/>
+                </a:pPr>
+                <a:r>
+                  <a:t/>
+                </a:r>
+                <a:endParaRPr b="0" i="0" sz="1100" u="none" cap="none" strike="noStrike">
+                  <a:solidFill>
+                    <a:schemeClr val="dk1"/>
+                  </a:solidFill>
+                  <a:latin typeface="Arial"/>
+                  <a:ea typeface="Arial"/>
+                  <a:cs typeface="Arial"/>
+                  <a:sym typeface="Arial"/>
+                </a:endParaRPr>
+              </a:p>
+            </p:txBody>
+          </p:sp>
+          <p:cxnSp>
+            <p:nvCxnSpPr>
+              <p:cNvPr id="90" name="Google Shape;90;p17"/>
+              <p:cNvCxnSpPr>
+                <a:stCxn id="89" idx="1"/>
+              </p:cNvCxnSpPr>
+              <p:nvPr/>
+            </p:nvCxnSpPr>
+            <p:spPr>
+              <a:xfrm flipH="1">
+                <a:off x="3179128" y="2010078"/>
+                <a:ext cx="1045800" cy="19800"/>
+              </a:xfrm>
+              <a:prstGeom prst="straightConnector1">
+                <a:avLst/>
+              </a:prstGeom>
+              <a:noFill/>
+              <a:ln cap="flat" cmpd="sng" w="12700">
+                <a:solidFill>
+                  <a:srgbClr val="FADF4B"/>
+                </a:solidFill>
+                <a:prstDash val="solid"/>
+                <a:miter lim="800000"/>
+                <a:headEnd len="sm" w="sm" type="none"/>
+                <a:tailEnd len="sm" w="sm" type="none"/>
+              </a:ln>
+            </p:spPr>
+          </p:cxnSp>
+        </p:grpSp>
+        <p:sp>
+          <p:nvSpPr>
+            <p:cNvPr id="91" name="Google Shape;91;p17"/>
+            <p:cNvSpPr/>
+            <p:nvPr/>
+          </p:nvSpPr>
+          <p:spPr>
+            <a:xfrm>
+              <a:off x="10443265" y="2987104"/>
+              <a:ext cx="637800" cy="637800"/>
+            </a:xfrm>
+            <a:prstGeom prst="arc">
+              <a:avLst>
+                <a:gd fmla="val 16200000" name="adj1"/>
+                <a:gd fmla="val 2547781" name="adj2"/>
+              </a:avLst>
+            </a:prstGeom>
+            <a:noFill/>
+            <a:ln cap="flat" cmpd="sng" w="19050">
+              <a:solidFill>
+                <a:srgbClr val="FADF4B"/>
+              </a:solidFill>
+              <a:prstDash val="solid"/>
+              <a:miter lim="800000"/>
+              <a:headEnd len="sm" w="sm" type="none"/>
+              <a:tailEnd len="sm" w="sm" type="none"/>
+            </a:ln>
+          </p:spPr>
+          <p:txBody>
+            <a:bodyPr anchorCtr="0" anchor="ctr" bIns="25700" lIns="51425" spcFirstLastPara="1" rIns="51425" wrap="square" tIns="25700">
+              <a:noAutofit/>
+            </a:bodyPr>
+            <a:lstStyle/>
+            <a:p>
+              <a:pPr indent="0" lvl="0" marL="0" marR="0" rtl="0" algn="ctr">
+                <a:lnSpc>
+                  <a:spcPct val="100000"/>
+                </a:lnSpc>
+                <a:spcBef>
+                  <a:spcPts val="0"/>
+                </a:spcBef>
+                <a:spcAft>
+                  <a:spcPts val="0"/>
+                </a:spcAft>
+                <a:buClr>
+                  <a:schemeClr val="dk1"/>
+                </a:buClr>
+                <a:buSzPts val="1100"/>
+                <a:buFont typeface="Manrope"/>
+                <a:buNone/>
+              </a:pPr>
+              <a:r>
+                <a:t/>
+              </a:r>
+              <a:endParaRPr b="0" i="0" sz="1100" u="none" cap="none" strike="noStrike">
+                <a:solidFill>
+                  <a:schemeClr val="dk1"/>
+                </a:solidFill>
+                <a:latin typeface="Arial"/>
+                <a:ea typeface="Arial"/>
+                <a:cs typeface="Arial"/>
+                <a:sym typeface="Arial"/>
+              </a:endParaRPr>
+            </a:p>
+          </p:txBody>
+        </p:sp>
+      </p:grpSp>
+    </p:spTree>
+  </p:cSld>
+  <p:clrMapOvr>
+    <a:masterClrMapping/>
+  </p:clrMapOvr>
+</p:sld>
+</file>
+
 <file path=ppt/slides/slide7.xml><?xml version="1.0" encoding="utf-8"?>
 <p:sld xmlns:a="http://schemas.openxmlformats.org/drawingml/2006/main" xmlns:r="http://schemas.openxmlformats.org/officeDocument/2006/relationships" xmlns:mc="http://schemas.openxmlformats.org/markup-compatibility/2006" xmlns:mv="urn:schemas-microsoft-com:mac:vml" xmlns:p="http://schemas.openxmlformats.org/presentationml/2006/main" xmlns:c="http://schemas.openxmlformats.org/drawingml/2006/chart" xmlns:dgm="http://schemas.openxmlformats.org/drawingml/2006/diagram" xmlns:o="urn:schemas-microsoft-com:office:office" xmlns:v="urn:schemas-microsoft-com:vml" xmlns:pvml="urn:schemas-microsoft-com:office:powerpoint" xmlns:com="http://schemas.openxmlformats.org/drawingml/2006/compatibility" xmlns:p14="http://schemas.microsoft.com/office/powerpoint/2010/main" xmlns:p15="http://schemas.microsoft.com/office/powerpoint/2012/main" xmlns:ahyp="http://schemas.microsoft.com/office/drawing/2018/hyperlinkcolor">
   <p:cSld>
@@ -35718,7 +36860,7 @@
                   <a:cs typeface="Arial"/>
                   <a:sym typeface="Arial"/>
                 </a:rPr>
-                <a:t>Тайлбар</a:t>
+                <a:t>Гарчиг</a:t>
               </a:r>
               <a:endParaRPr b="0" i="0" sz="1600" u="none" cap="none" strike="noStrike">
                 <a:solidFill>
@@ -35865,7 +37007,7 @@
                   <a:cs typeface="Arial"/>
                   <a:sym typeface="Arial"/>
                 </a:rPr>
-                <a:t>Зорилт</a:t>
+                <a:t>Агуулга</a:t>
               </a:r>
               <a:endParaRPr b="0" i="0" sz="1600" u="none" cap="none" strike="noStrike">
                 <a:solidFill>
@@ -36012,7 +37154,7 @@
                   <a:cs typeface="Arial"/>
                   <a:sym typeface="Arial"/>
                 </a:rPr>
-                <a:t>Санаа</a:t>
+                <a:t>Тайлбар</a:t>
               </a:r>
               <a:endParaRPr b="0" i="0" sz="1600" u="none" cap="none" strike="noStrike">
                 <a:solidFill>
@@ -36543,7 +37685,7 @@
                 <a:cs typeface="Arial"/>
                 <a:sym typeface="Arial"/>
               </a:rPr>
-              <a:t>Төслийн явц, үр дүнг энд харуулна. Багаараа хамтран шинэ шийдэл хэрэгжүүлнэ. Зах зээлийн судалгаанд үндэслэн шийдвэр гаргана.</a:t>
+              <a:t>Өсөлтийг тогтмол хэмжиж, сайжруулна. Энэ хэсэгт өөрийн текстээ оруулна уу. Гол үзүүлэлтүүдээ товч дурдана. Хэрэглэгчийн хэрэгцээг нарийн судална.</a:t>
             </a:r>
             <a:endParaRPr/>
           </a:p>
@@ -36645,7 +37787,7 @@
                 <a:cs typeface="Arial"/>
                 <a:sym typeface="Arial"/>
               </a:rPr>
-              <a:t>Тайлбар</a:t>
+              <a:t>Агуулга</a:t>
             </a:r>
             <a:endParaRPr b="1" i="0" sz="1200" u="none" cap="none" strike="noStrike">
               <a:solidFill>
@@ -37489,7 +38631,7 @@
                   <a:cs typeface="Arial"/>
                   <a:sym typeface="Arial"/>
                 </a:rPr>
-                <a:t>Бид хэрэглэгчдэдээ үнэ цэн бүтээхийг зорьдог. </a:t>
+                <a:t>Дараагийн алхмуудаа тодорхой төлөвлөнө. </a:t>
               </a:r>
               <a:endParaRPr/>
             </a:p>
@@ -37542,7 +38684,7 @@
                   <a:cs typeface="Arial"/>
                   <a:sym typeface="Arial"/>
                 </a:rPr>
-                <a:t>ҮР ДҮН</a:t>
+                <a:t>ЗОРИЛТ</a:t>
               </a:r>
               <a:endParaRPr/>
             </a:p>
@@ -38001,7 +39143,7 @@
                           <a:cs typeface="Arial"/>
                           <a:sym typeface="Arial"/>
                         </a:rPr>
-                        <a:t>Тайлбар</a:t>
+                        <a:t>Гарчиг</a:t>
                       </a:r>
                       <a:endParaRPr sz="1100" u="none" cap="none" strike="noStrike">
                         <a:solidFill>
@@ -38091,7 +39233,7 @@
                           <a:cs typeface="Arial"/>
                           <a:sym typeface="Arial"/>
                         </a:rPr>
-                        <a:t>Зорилт</a:t>
+                        <a:t>Агуулга</a:t>
                       </a:r>
                       <a:endParaRPr sz="1100" u="none" cap="none" strike="noStrike">
                         <a:solidFill>
@@ -38179,7 +39321,7 @@
                           <a:cs typeface="Arial"/>
                           <a:sym typeface="Arial"/>
                         </a:rPr>
-                        <a:t>Санаа</a:t>
+                        <a:t>Тайлбар</a:t>
                       </a:r>
                       <a:endParaRPr sz="1100" u="none" cap="none" strike="noStrike">
                         <a:solidFill>
@@ -38258,18 +39400,6 @@
                         <a:buNone/>
                       </a:pPr>
                       <a:r>
-                        <a:rPr b="1" i="0" lang="mn-MN" sz="1100" u="none" cap="none" strike="noStrike">
-                          <a:solidFill>
-                            <a:schemeClr val="lt1"/>
-                          </a:solidFill>
-                          <a:latin typeface="Arial"/>
-                          <a:ea typeface="Arial"/>
-                          <a:cs typeface="Arial"/>
-                          <a:sym typeface="Arial"/>
-                        </a:rPr>
-                        <a:t>Үр </a:t>
-                      </a:r>
-                      <a:r>
                         <a:rPr b="1" lang="mn-MN" sz="1100" u="none" cap="none" strike="noStrike">
                           <a:solidFill>
                             <a:schemeClr val="lt1"/>
@@ -38279,7 +39409,7 @@
                           <a:cs typeface="Arial"/>
                           <a:sym typeface="Arial"/>
                         </a:rPr>
-                        <a:t>дүн</a:t>
+                        <a:t>Зорилт</a:t>
                       </a:r>
                       <a:endParaRPr sz="1100" u="none" cap="none" strike="noStrike">
                         <a:solidFill>
